--- a/Praise To The Lord The Almighty.pptx
+++ b/Praise To The Lord The Almighty.pptx
@@ -2,22 +2,28 @@
 <file path=ppt/presentation.xml><?xml version="1.0" encoding="utf-8"?>
 <p:presentation xmlns:a="http://schemas.openxmlformats.org/drawingml/2006/main" xmlns:r="http://schemas.openxmlformats.org/officeDocument/2006/relationships" xmlns:p="http://schemas.openxmlformats.org/presentationml/2006/main" saveSubsetFonts="1" autoCompressPictures="0">
   <p:sldMasterIdLst>
-    <p:sldMasterId id="2147483648" r:id="rId1"/>
+    <p:sldMasterId id="2147483660" r:id="rId1"/>
   </p:sldMasterIdLst>
   <p:sldIdLst>
-    <p:sldId id="281" r:id="rId2"/>
+    <p:sldId id="285" r:id="rId2"/>
     <p:sldId id="274" r:id="rId3"/>
-    <p:sldId id="282" r:id="rId4"/>
-    <p:sldId id="283" r:id="rId5"/>
-    <p:sldId id="284" r:id="rId6"/>
+    <p:sldId id="286" r:id="rId4"/>
+    <p:sldId id="282" r:id="rId5"/>
+    <p:sldId id="287" r:id="rId6"/>
+    <p:sldId id="283" r:id="rId7"/>
+    <p:sldId id="288" r:id="rId8"/>
+    <p:sldId id="284" r:id="rId9"/>
+    <p:sldId id="289" r:id="rId10"/>
+    <p:sldId id="290" r:id="rId11"/>
+    <p:sldId id="291" r:id="rId12"/>
   </p:sldIdLst>
-  <p:sldSz cx="12192000" cy="6858000"/>
+  <p:sldSz cx="9144000" cy="6858000" type="screen4x3"/>
   <p:notesSz cx="6858000" cy="9144000"/>
   <p:defaultTextStyle>
     <a:defPPr>
       <a:defRPr lang="en-US"/>
     </a:defPPr>
-    <a:lvl1pPr marL="0" algn="l" defTabSz="914400" rtl="0" eaLnBrk="1" latinLnBrk="0" hangingPunct="1">
+    <a:lvl1pPr marL="0" algn="l" defTabSz="457200" rtl="0" eaLnBrk="1" latinLnBrk="0" hangingPunct="1">
       <a:defRPr sz="1800" kern="1200">
         <a:solidFill>
           <a:schemeClr val="tx1"/>
@@ -27,7 +33,7 @@
         <a:cs typeface="+mn-cs"/>
       </a:defRPr>
     </a:lvl1pPr>
-    <a:lvl2pPr marL="457200" algn="l" defTabSz="914400" rtl="0" eaLnBrk="1" latinLnBrk="0" hangingPunct="1">
+    <a:lvl2pPr marL="457200" algn="l" defTabSz="457200" rtl="0" eaLnBrk="1" latinLnBrk="0" hangingPunct="1">
       <a:defRPr sz="1800" kern="1200">
         <a:solidFill>
           <a:schemeClr val="tx1"/>
@@ -37,7 +43,7 @@
         <a:cs typeface="+mn-cs"/>
       </a:defRPr>
     </a:lvl2pPr>
-    <a:lvl3pPr marL="914400" algn="l" defTabSz="914400" rtl="0" eaLnBrk="1" latinLnBrk="0" hangingPunct="1">
+    <a:lvl3pPr marL="914400" algn="l" defTabSz="457200" rtl="0" eaLnBrk="1" latinLnBrk="0" hangingPunct="1">
       <a:defRPr sz="1800" kern="1200">
         <a:solidFill>
           <a:schemeClr val="tx1"/>
@@ -47,7 +53,7 @@
         <a:cs typeface="+mn-cs"/>
       </a:defRPr>
     </a:lvl3pPr>
-    <a:lvl4pPr marL="1371600" algn="l" defTabSz="914400" rtl="0" eaLnBrk="1" latinLnBrk="0" hangingPunct="1">
+    <a:lvl4pPr marL="1371600" algn="l" defTabSz="457200" rtl="0" eaLnBrk="1" latinLnBrk="0" hangingPunct="1">
       <a:defRPr sz="1800" kern="1200">
         <a:solidFill>
           <a:schemeClr val="tx1"/>
@@ -57,7 +63,7 @@
         <a:cs typeface="+mn-cs"/>
       </a:defRPr>
     </a:lvl4pPr>
-    <a:lvl5pPr marL="1828800" algn="l" defTabSz="914400" rtl="0" eaLnBrk="1" latinLnBrk="0" hangingPunct="1">
+    <a:lvl5pPr marL="1828800" algn="l" defTabSz="457200" rtl="0" eaLnBrk="1" latinLnBrk="0" hangingPunct="1">
       <a:defRPr sz="1800" kern="1200">
         <a:solidFill>
           <a:schemeClr val="tx1"/>
@@ -67,7 +73,7 @@
         <a:cs typeface="+mn-cs"/>
       </a:defRPr>
     </a:lvl5pPr>
-    <a:lvl6pPr marL="2286000" algn="l" defTabSz="914400" rtl="0" eaLnBrk="1" latinLnBrk="0" hangingPunct="1">
+    <a:lvl6pPr marL="2286000" algn="l" defTabSz="457200" rtl="0" eaLnBrk="1" latinLnBrk="0" hangingPunct="1">
       <a:defRPr sz="1800" kern="1200">
         <a:solidFill>
           <a:schemeClr val="tx1"/>
@@ -77,7 +83,7 @@
         <a:cs typeface="+mn-cs"/>
       </a:defRPr>
     </a:lvl6pPr>
-    <a:lvl7pPr marL="2743200" algn="l" defTabSz="914400" rtl="0" eaLnBrk="1" latinLnBrk="0" hangingPunct="1">
+    <a:lvl7pPr marL="2743200" algn="l" defTabSz="457200" rtl="0" eaLnBrk="1" latinLnBrk="0" hangingPunct="1">
       <a:defRPr sz="1800" kern="1200">
         <a:solidFill>
           <a:schemeClr val="tx1"/>
@@ -87,7 +93,7 @@
         <a:cs typeface="+mn-cs"/>
       </a:defRPr>
     </a:lvl7pPr>
-    <a:lvl8pPr marL="3200400" algn="l" defTabSz="914400" rtl="0" eaLnBrk="1" latinLnBrk="0" hangingPunct="1">
+    <a:lvl8pPr marL="3200400" algn="l" defTabSz="457200" rtl="0" eaLnBrk="1" latinLnBrk="0" hangingPunct="1">
       <a:defRPr sz="1800" kern="1200">
         <a:solidFill>
           <a:schemeClr val="tx1"/>
@@ -97,7 +103,7 @@
         <a:cs typeface="+mn-cs"/>
       </a:defRPr>
     </a:lvl8pPr>
-    <a:lvl9pPr marL="3657600" algn="l" defTabSz="914400" rtl="0" eaLnBrk="1" latinLnBrk="0" hangingPunct="1">
+    <a:lvl9pPr marL="3657600" algn="l" defTabSz="457200" rtl="0" eaLnBrk="1" latinLnBrk="0" hangingPunct="1">
       <a:defRPr sz="1800" kern="1200">
         <a:solidFill>
           <a:schemeClr val="tx1"/>
@@ -135,13 +141,7 @@
       </p:grpSpPr>
       <p:sp>
         <p:nvSpPr>
-          <p:cNvPr id="2" name="Title 1">
-            <a:extLst>
-              <a:ext uri="{FF2B5EF4-FFF2-40B4-BE49-F238E27FC236}">
-                <a16:creationId xmlns:a16="http://schemas.microsoft.com/office/drawing/2014/main" id="{50FC4881-024B-CA4F-1A53-33C2DC0E7490}"/>
-              </a:ext>
-            </a:extLst>
-          </p:cNvPr>
+          <p:cNvPr id="2" name="Title 1"/>
           <p:cNvSpPr>
             <a:spLocks noGrp="1"/>
           </p:cNvSpPr>
@@ -151,8 +151,8 @@
         </p:nvSpPr>
         <p:spPr>
           <a:xfrm>
-            <a:off x="1524000" y="1122363"/>
-            <a:ext cx="9144000" cy="2387600"/>
+            <a:off x="685800" y="1122363"/>
+            <a:ext cx="7772400" cy="2387600"/>
           </a:xfrm>
         </p:spPr>
         <p:txBody>
@@ -167,18 +167,13 @@
               <a:rPr lang="en-US"/>
               <a:t>Click to edit Master title style</a:t>
             </a:r>
-          </a:p>
-        </p:txBody>
-      </p:sp>
-      <p:sp>
-        <p:nvSpPr>
-          <p:cNvPr id="3" name="Subtitle 2">
-            <a:extLst>
-              <a:ext uri="{FF2B5EF4-FFF2-40B4-BE49-F238E27FC236}">
-                <a16:creationId xmlns:a16="http://schemas.microsoft.com/office/drawing/2014/main" id="{8B0D2959-CEED-C8E4-130C-7C436E2473A7}"/>
-              </a:ext>
-            </a:extLst>
-          </p:cNvPr>
+            <a:endParaRPr lang="en-US" dirty="0"/>
+          </a:p>
+        </p:txBody>
+      </p:sp>
+      <p:sp>
+        <p:nvSpPr>
+          <p:cNvPr id="3" name="Subtitle 2"/>
           <p:cNvSpPr>
             <a:spLocks noGrp="1"/>
           </p:cNvSpPr>
@@ -188,8 +183,8 @@
         </p:nvSpPr>
         <p:spPr>
           <a:xfrm>
-            <a:off x="1524000" y="3602038"/>
-            <a:ext cx="9144000" cy="1655762"/>
+            <a:off x="1143000" y="3602038"/>
+            <a:ext cx="6858000" cy="1655762"/>
           </a:xfrm>
         </p:spPr>
         <p:txBody>
@@ -237,18 +232,13 @@
               <a:rPr lang="en-US"/>
               <a:t>Click to edit Master subtitle style</a:t>
             </a:r>
-          </a:p>
-        </p:txBody>
-      </p:sp>
-      <p:sp>
-        <p:nvSpPr>
-          <p:cNvPr id="4" name="Date Placeholder 3">
-            <a:extLst>
-              <a:ext uri="{FF2B5EF4-FFF2-40B4-BE49-F238E27FC236}">
-                <a16:creationId xmlns:a16="http://schemas.microsoft.com/office/drawing/2014/main" id="{4ABBB692-36FC-D0C6-12D7-33A0E66EA065}"/>
-              </a:ext>
-            </a:extLst>
-          </p:cNvPr>
+            <a:endParaRPr lang="en-US" dirty="0"/>
+          </a:p>
+        </p:txBody>
+      </p:sp>
+      <p:sp>
+        <p:nvSpPr>
+          <p:cNvPr id="4" name="Date Placeholder 3"/>
           <p:cNvSpPr>
             <a:spLocks noGrp="1"/>
           </p:cNvSpPr>
@@ -263,7 +253,7 @@
           <a:p>
             <a:fld id="{E759A0DE-F190-5444-87AC-4719D5F20D15}" type="datetimeFigureOut">
               <a:rPr lang="en-US" smtClean="0"/>
-              <a:t>6/3/26</a:t>
+              <a:t>6/11/26</a:t>
             </a:fld>
             <a:endParaRPr lang="en-US"/>
           </a:p>
@@ -271,13 +261,7 @@
       </p:sp>
       <p:sp>
         <p:nvSpPr>
-          <p:cNvPr id="5" name="Footer Placeholder 4">
-            <a:extLst>
-              <a:ext uri="{FF2B5EF4-FFF2-40B4-BE49-F238E27FC236}">
-                <a16:creationId xmlns:a16="http://schemas.microsoft.com/office/drawing/2014/main" id="{51817876-8CFB-960B-6A57-C7F9FD39D3EC}"/>
-              </a:ext>
-            </a:extLst>
-          </p:cNvPr>
+          <p:cNvPr id="5" name="Footer Placeholder 4"/>
           <p:cNvSpPr>
             <a:spLocks noGrp="1"/>
           </p:cNvSpPr>
@@ -296,13 +280,7 @@
       </p:sp>
       <p:sp>
         <p:nvSpPr>
-          <p:cNvPr id="6" name="Slide Number Placeholder 5">
-            <a:extLst>
-              <a:ext uri="{FF2B5EF4-FFF2-40B4-BE49-F238E27FC236}">
-                <a16:creationId xmlns:a16="http://schemas.microsoft.com/office/drawing/2014/main" id="{DB548E83-1153-3307-5818-CD7F2833A3F5}"/>
-              </a:ext>
-            </a:extLst>
-          </p:cNvPr>
+          <p:cNvPr id="6" name="Slide Number Placeholder 5"/>
           <p:cNvSpPr>
             <a:spLocks noGrp="1"/>
           </p:cNvSpPr>
@@ -326,7 +304,7 @@
     </p:spTree>
     <p:extLst>
       <p:ext uri="{BB962C8B-B14F-4D97-AF65-F5344CB8AC3E}">
-        <p14:creationId xmlns:p14="http://schemas.microsoft.com/office/powerpoint/2010/main" val="2594881872"/>
+        <p14:creationId xmlns:p14="http://schemas.microsoft.com/office/powerpoint/2010/main" val="2165142075"/>
       </p:ext>
     </p:extLst>
   </p:cSld>
@@ -355,13 +333,7 @@
       </p:grpSpPr>
       <p:sp>
         <p:nvSpPr>
-          <p:cNvPr id="2" name="Title 1">
-            <a:extLst>
-              <a:ext uri="{FF2B5EF4-FFF2-40B4-BE49-F238E27FC236}">
-                <a16:creationId xmlns:a16="http://schemas.microsoft.com/office/drawing/2014/main" id="{9015C597-3152-5765-EBC1-B17D9951543D}"/>
-              </a:ext>
-            </a:extLst>
-          </p:cNvPr>
+          <p:cNvPr id="2" name="Title 1"/>
           <p:cNvSpPr>
             <a:spLocks noGrp="1"/>
           </p:cNvSpPr>
@@ -378,18 +350,13 @@
               <a:rPr lang="en-US"/>
               <a:t>Click to edit Master title style</a:t>
             </a:r>
-          </a:p>
-        </p:txBody>
-      </p:sp>
-      <p:sp>
-        <p:nvSpPr>
-          <p:cNvPr id="3" name="Vertical Text Placeholder 2">
-            <a:extLst>
-              <a:ext uri="{FF2B5EF4-FFF2-40B4-BE49-F238E27FC236}">
-                <a16:creationId xmlns:a16="http://schemas.microsoft.com/office/drawing/2014/main" id="{5BA5F73E-18E1-021C-9878-B37DC31E2802}"/>
-              </a:ext>
-            </a:extLst>
-          </p:cNvPr>
+            <a:endParaRPr lang="en-US" dirty="0"/>
+          </a:p>
+        </p:txBody>
+      </p:sp>
+      <p:sp>
+        <p:nvSpPr>
+          <p:cNvPr id="3" name="Vertical Text Placeholder 2"/>
           <p:cNvSpPr>
             <a:spLocks noGrp="1"/>
           </p:cNvSpPr>
@@ -435,18 +402,13 @@
               <a:rPr lang="en-US"/>
               <a:t>Fifth level</a:t>
             </a:r>
-          </a:p>
-        </p:txBody>
-      </p:sp>
-      <p:sp>
-        <p:nvSpPr>
-          <p:cNvPr id="4" name="Date Placeholder 3">
-            <a:extLst>
-              <a:ext uri="{FF2B5EF4-FFF2-40B4-BE49-F238E27FC236}">
-                <a16:creationId xmlns:a16="http://schemas.microsoft.com/office/drawing/2014/main" id="{B683AF53-E0B5-2F63-C15E-4BF621A3186B}"/>
-              </a:ext>
-            </a:extLst>
-          </p:cNvPr>
+            <a:endParaRPr lang="en-US" dirty="0"/>
+          </a:p>
+        </p:txBody>
+      </p:sp>
+      <p:sp>
+        <p:nvSpPr>
+          <p:cNvPr id="4" name="Date Placeholder 3"/>
           <p:cNvSpPr>
             <a:spLocks noGrp="1"/>
           </p:cNvSpPr>
@@ -461,7 +423,7 @@
           <a:p>
             <a:fld id="{E759A0DE-F190-5444-87AC-4719D5F20D15}" type="datetimeFigureOut">
               <a:rPr lang="en-US" smtClean="0"/>
-              <a:t>6/3/26</a:t>
+              <a:t>6/11/26</a:t>
             </a:fld>
             <a:endParaRPr lang="en-US"/>
           </a:p>
@@ -469,13 +431,7 @@
       </p:sp>
       <p:sp>
         <p:nvSpPr>
-          <p:cNvPr id="5" name="Footer Placeholder 4">
-            <a:extLst>
-              <a:ext uri="{FF2B5EF4-FFF2-40B4-BE49-F238E27FC236}">
-                <a16:creationId xmlns:a16="http://schemas.microsoft.com/office/drawing/2014/main" id="{D1CA465D-C46F-7FA4-9154-773B74869505}"/>
-              </a:ext>
-            </a:extLst>
-          </p:cNvPr>
+          <p:cNvPr id="5" name="Footer Placeholder 4"/>
           <p:cNvSpPr>
             <a:spLocks noGrp="1"/>
           </p:cNvSpPr>
@@ -494,13 +450,7 @@
       </p:sp>
       <p:sp>
         <p:nvSpPr>
-          <p:cNvPr id="6" name="Slide Number Placeholder 5">
-            <a:extLst>
-              <a:ext uri="{FF2B5EF4-FFF2-40B4-BE49-F238E27FC236}">
-                <a16:creationId xmlns:a16="http://schemas.microsoft.com/office/drawing/2014/main" id="{BBA3BEE5-DE05-B54F-20CA-E8C336AE957E}"/>
-              </a:ext>
-            </a:extLst>
-          </p:cNvPr>
+          <p:cNvPr id="6" name="Slide Number Placeholder 5"/>
           <p:cNvSpPr>
             <a:spLocks noGrp="1"/>
           </p:cNvSpPr>
@@ -524,7 +474,7 @@
     </p:spTree>
     <p:extLst>
       <p:ext uri="{BB962C8B-B14F-4D97-AF65-F5344CB8AC3E}">
-        <p14:creationId xmlns:p14="http://schemas.microsoft.com/office/powerpoint/2010/main" val="3115587574"/>
+        <p14:creationId xmlns:p14="http://schemas.microsoft.com/office/powerpoint/2010/main" val="3932646068"/>
       </p:ext>
     </p:extLst>
   </p:cSld>
@@ -553,13 +503,7 @@
       </p:grpSpPr>
       <p:sp>
         <p:nvSpPr>
-          <p:cNvPr id="2" name="Vertical Title 1">
-            <a:extLst>
-              <a:ext uri="{FF2B5EF4-FFF2-40B4-BE49-F238E27FC236}">
-                <a16:creationId xmlns:a16="http://schemas.microsoft.com/office/drawing/2014/main" id="{42C72931-C193-DCDC-01FD-20CDA0AD4513}"/>
-              </a:ext>
-            </a:extLst>
-          </p:cNvPr>
+          <p:cNvPr id="2" name="Vertical Title 1"/>
           <p:cNvSpPr>
             <a:spLocks noGrp="1"/>
           </p:cNvSpPr>
@@ -569,8 +513,8 @@
         </p:nvSpPr>
         <p:spPr>
           <a:xfrm>
-            <a:off x="8724900" y="365125"/>
-            <a:ext cx="2628900" cy="5811838"/>
+            <a:off x="6543675" y="365125"/>
+            <a:ext cx="1971675" cy="5811838"/>
           </a:xfrm>
         </p:spPr>
         <p:txBody>
@@ -581,18 +525,13 @@
               <a:rPr lang="en-US"/>
               <a:t>Click to edit Master title style</a:t>
             </a:r>
-          </a:p>
-        </p:txBody>
-      </p:sp>
-      <p:sp>
-        <p:nvSpPr>
-          <p:cNvPr id="3" name="Vertical Text Placeholder 2">
-            <a:extLst>
-              <a:ext uri="{FF2B5EF4-FFF2-40B4-BE49-F238E27FC236}">
-                <a16:creationId xmlns:a16="http://schemas.microsoft.com/office/drawing/2014/main" id="{E65B2C1B-4D9D-9A62-13D7-01C6580B781D}"/>
-              </a:ext>
-            </a:extLst>
-          </p:cNvPr>
+            <a:endParaRPr lang="en-US" dirty="0"/>
+          </a:p>
+        </p:txBody>
+      </p:sp>
+      <p:sp>
+        <p:nvSpPr>
+          <p:cNvPr id="3" name="Vertical Text Placeholder 2"/>
           <p:cNvSpPr>
             <a:spLocks noGrp="1"/>
           </p:cNvSpPr>
@@ -602,8 +541,8 @@
         </p:nvSpPr>
         <p:spPr>
           <a:xfrm>
-            <a:off x="838200" y="365125"/>
-            <a:ext cx="7734300" cy="5811838"/>
+            <a:off x="628650" y="365125"/>
+            <a:ext cx="5800725" cy="5811838"/>
           </a:xfrm>
         </p:spPr>
         <p:txBody>
@@ -643,18 +582,13 @@
               <a:rPr lang="en-US"/>
               <a:t>Fifth level</a:t>
             </a:r>
-          </a:p>
-        </p:txBody>
-      </p:sp>
-      <p:sp>
-        <p:nvSpPr>
-          <p:cNvPr id="4" name="Date Placeholder 3">
-            <a:extLst>
-              <a:ext uri="{FF2B5EF4-FFF2-40B4-BE49-F238E27FC236}">
-                <a16:creationId xmlns:a16="http://schemas.microsoft.com/office/drawing/2014/main" id="{57445465-66E1-00A0-A5D2-D034616CC34D}"/>
-              </a:ext>
-            </a:extLst>
-          </p:cNvPr>
+            <a:endParaRPr lang="en-US" dirty="0"/>
+          </a:p>
+        </p:txBody>
+      </p:sp>
+      <p:sp>
+        <p:nvSpPr>
+          <p:cNvPr id="4" name="Date Placeholder 3"/>
           <p:cNvSpPr>
             <a:spLocks noGrp="1"/>
           </p:cNvSpPr>
@@ -669,7 +603,7 @@
           <a:p>
             <a:fld id="{E759A0DE-F190-5444-87AC-4719D5F20D15}" type="datetimeFigureOut">
               <a:rPr lang="en-US" smtClean="0"/>
-              <a:t>6/3/26</a:t>
+              <a:t>6/11/26</a:t>
             </a:fld>
             <a:endParaRPr lang="en-US"/>
           </a:p>
@@ -677,13 +611,7 @@
       </p:sp>
       <p:sp>
         <p:nvSpPr>
-          <p:cNvPr id="5" name="Footer Placeholder 4">
-            <a:extLst>
-              <a:ext uri="{FF2B5EF4-FFF2-40B4-BE49-F238E27FC236}">
-                <a16:creationId xmlns:a16="http://schemas.microsoft.com/office/drawing/2014/main" id="{F253519E-C69A-9396-C73F-1ACB40774508}"/>
-              </a:ext>
-            </a:extLst>
-          </p:cNvPr>
+          <p:cNvPr id="5" name="Footer Placeholder 4"/>
           <p:cNvSpPr>
             <a:spLocks noGrp="1"/>
           </p:cNvSpPr>
@@ -702,13 +630,7 @@
       </p:sp>
       <p:sp>
         <p:nvSpPr>
-          <p:cNvPr id="6" name="Slide Number Placeholder 5">
-            <a:extLst>
-              <a:ext uri="{FF2B5EF4-FFF2-40B4-BE49-F238E27FC236}">
-                <a16:creationId xmlns:a16="http://schemas.microsoft.com/office/drawing/2014/main" id="{CC85BFC6-ABA4-44D2-E110-CE59D7D2AE43}"/>
-              </a:ext>
-            </a:extLst>
-          </p:cNvPr>
+          <p:cNvPr id="6" name="Slide Number Placeholder 5"/>
           <p:cNvSpPr>
             <a:spLocks noGrp="1"/>
           </p:cNvSpPr>
@@ -732,7 +654,7 @@
     </p:spTree>
     <p:extLst>
       <p:ext uri="{BB962C8B-B14F-4D97-AF65-F5344CB8AC3E}">
-        <p14:creationId xmlns:p14="http://schemas.microsoft.com/office/powerpoint/2010/main" val="1588597314"/>
+        <p14:creationId xmlns:p14="http://schemas.microsoft.com/office/powerpoint/2010/main" val="3038799344"/>
       </p:ext>
     </p:extLst>
   </p:cSld>
@@ -761,13 +683,7 @@
       </p:grpSpPr>
       <p:sp>
         <p:nvSpPr>
-          <p:cNvPr id="2" name="Title 1">
-            <a:extLst>
-              <a:ext uri="{FF2B5EF4-FFF2-40B4-BE49-F238E27FC236}">
-                <a16:creationId xmlns:a16="http://schemas.microsoft.com/office/drawing/2014/main" id="{A4C6B7EA-B38C-12D1-5730-E271A11FB914}"/>
-              </a:ext>
-            </a:extLst>
-          </p:cNvPr>
+          <p:cNvPr id="2" name="Title 1"/>
           <p:cNvSpPr>
             <a:spLocks noGrp="1"/>
           </p:cNvSpPr>
@@ -784,18 +700,13 @@
               <a:rPr lang="en-US"/>
               <a:t>Click to edit Master title style</a:t>
             </a:r>
-          </a:p>
-        </p:txBody>
-      </p:sp>
-      <p:sp>
-        <p:nvSpPr>
-          <p:cNvPr id="3" name="Content Placeholder 2">
-            <a:extLst>
-              <a:ext uri="{FF2B5EF4-FFF2-40B4-BE49-F238E27FC236}">
-                <a16:creationId xmlns:a16="http://schemas.microsoft.com/office/drawing/2014/main" id="{5D8D1A30-880C-91DF-D6D6-0BE623BC9F03}"/>
-              </a:ext>
-            </a:extLst>
-          </p:cNvPr>
+            <a:endParaRPr lang="en-US" dirty="0"/>
+          </a:p>
+        </p:txBody>
+      </p:sp>
+      <p:sp>
+        <p:nvSpPr>
+          <p:cNvPr id="3" name="Content Placeholder 2"/>
           <p:cNvSpPr>
             <a:spLocks noGrp="1"/>
           </p:cNvSpPr>
@@ -841,18 +752,13 @@
               <a:rPr lang="en-US"/>
               <a:t>Fifth level</a:t>
             </a:r>
-          </a:p>
-        </p:txBody>
-      </p:sp>
-      <p:sp>
-        <p:nvSpPr>
-          <p:cNvPr id="4" name="Date Placeholder 3">
-            <a:extLst>
-              <a:ext uri="{FF2B5EF4-FFF2-40B4-BE49-F238E27FC236}">
-                <a16:creationId xmlns:a16="http://schemas.microsoft.com/office/drawing/2014/main" id="{27753098-E2DC-41B2-9361-756938A8EBFE}"/>
-              </a:ext>
-            </a:extLst>
-          </p:cNvPr>
+            <a:endParaRPr lang="en-US" dirty="0"/>
+          </a:p>
+        </p:txBody>
+      </p:sp>
+      <p:sp>
+        <p:nvSpPr>
+          <p:cNvPr id="4" name="Date Placeholder 3"/>
           <p:cNvSpPr>
             <a:spLocks noGrp="1"/>
           </p:cNvSpPr>
@@ -867,7 +773,7 @@
           <a:p>
             <a:fld id="{E759A0DE-F190-5444-87AC-4719D5F20D15}" type="datetimeFigureOut">
               <a:rPr lang="en-US" smtClean="0"/>
-              <a:t>6/3/26</a:t>
+              <a:t>6/11/26</a:t>
             </a:fld>
             <a:endParaRPr lang="en-US"/>
           </a:p>
@@ -875,13 +781,7 @@
       </p:sp>
       <p:sp>
         <p:nvSpPr>
-          <p:cNvPr id="5" name="Footer Placeholder 4">
-            <a:extLst>
-              <a:ext uri="{FF2B5EF4-FFF2-40B4-BE49-F238E27FC236}">
-                <a16:creationId xmlns:a16="http://schemas.microsoft.com/office/drawing/2014/main" id="{E463E6B5-5EA8-FE6C-FA06-4515DC0C07A4}"/>
-              </a:ext>
-            </a:extLst>
-          </p:cNvPr>
+          <p:cNvPr id="5" name="Footer Placeholder 4"/>
           <p:cNvSpPr>
             <a:spLocks noGrp="1"/>
           </p:cNvSpPr>
@@ -900,13 +800,7 @@
       </p:sp>
       <p:sp>
         <p:nvSpPr>
-          <p:cNvPr id="6" name="Slide Number Placeholder 5">
-            <a:extLst>
-              <a:ext uri="{FF2B5EF4-FFF2-40B4-BE49-F238E27FC236}">
-                <a16:creationId xmlns:a16="http://schemas.microsoft.com/office/drawing/2014/main" id="{196A6D58-9856-3B55-DBEA-1B9A3269B325}"/>
-              </a:ext>
-            </a:extLst>
-          </p:cNvPr>
+          <p:cNvPr id="6" name="Slide Number Placeholder 5"/>
           <p:cNvSpPr>
             <a:spLocks noGrp="1"/>
           </p:cNvSpPr>
@@ -930,7 +824,7 @@
     </p:spTree>
     <p:extLst>
       <p:ext uri="{BB962C8B-B14F-4D97-AF65-F5344CB8AC3E}">
-        <p14:creationId xmlns:p14="http://schemas.microsoft.com/office/powerpoint/2010/main" val="1474312020"/>
+        <p14:creationId xmlns:p14="http://schemas.microsoft.com/office/powerpoint/2010/main" val="2891433653"/>
       </p:ext>
     </p:extLst>
   </p:cSld>
@@ -959,13 +853,7 @@
       </p:grpSpPr>
       <p:sp>
         <p:nvSpPr>
-          <p:cNvPr id="2" name="Title 1">
-            <a:extLst>
-              <a:ext uri="{FF2B5EF4-FFF2-40B4-BE49-F238E27FC236}">
-                <a16:creationId xmlns:a16="http://schemas.microsoft.com/office/drawing/2014/main" id="{F3003BE6-BFB2-0EF8-7BD3-99B4FF56B7C7}"/>
-              </a:ext>
-            </a:extLst>
-          </p:cNvPr>
+          <p:cNvPr id="2" name="Title 1"/>
           <p:cNvSpPr>
             <a:spLocks noGrp="1"/>
           </p:cNvSpPr>
@@ -975,8 +863,8 @@
         </p:nvSpPr>
         <p:spPr>
           <a:xfrm>
-            <a:off x="831850" y="1709738"/>
-            <a:ext cx="10515600" cy="2852737"/>
+            <a:off x="623888" y="1709739"/>
+            <a:ext cx="7886700" cy="2852737"/>
           </a:xfrm>
         </p:spPr>
         <p:txBody>
@@ -991,18 +879,13 @@
               <a:rPr lang="en-US"/>
               <a:t>Click to edit Master title style</a:t>
             </a:r>
-          </a:p>
-        </p:txBody>
-      </p:sp>
-      <p:sp>
-        <p:nvSpPr>
-          <p:cNvPr id="3" name="Text Placeholder 2">
-            <a:extLst>
-              <a:ext uri="{FF2B5EF4-FFF2-40B4-BE49-F238E27FC236}">
-                <a16:creationId xmlns:a16="http://schemas.microsoft.com/office/drawing/2014/main" id="{95E87140-F157-4DFF-CE20-2F5B759FC1E1}"/>
-              </a:ext>
-            </a:extLst>
-          </p:cNvPr>
+            <a:endParaRPr lang="en-US" dirty="0"/>
+          </a:p>
+        </p:txBody>
+      </p:sp>
+      <p:sp>
+        <p:nvSpPr>
+          <p:cNvPr id="3" name="Text Placeholder 2"/>
           <p:cNvSpPr>
             <a:spLocks noGrp="1"/>
           </p:cNvSpPr>
@@ -1012,8 +895,8 @@
         </p:nvSpPr>
         <p:spPr>
           <a:xfrm>
-            <a:off x="831850" y="4589463"/>
-            <a:ext cx="10515600" cy="1500187"/>
+            <a:off x="623888" y="4589464"/>
+            <a:ext cx="7886700" cy="1500187"/>
           </a:xfrm>
         </p:spPr>
         <p:txBody>
@@ -1121,13 +1004,7 @@
       </p:sp>
       <p:sp>
         <p:nvSpPr>
-          <p:cNvPr id="4" name="Date Placeholder 3">
-            <a:extLst>
-              <a:ext uri="{FF2B5EF4-FFF2-40B4-BE49-F238E27FC236}">
-                <a16:creationId xmlns:a16="http://schemas.microsoft.com/office/drawing/2014/main" id="{E119DC89-D1D7-E179-4B62-551014DFE5B3}"/>
-              </a:ext>
-            </a:extLst>
-          </p:cNvPr>
+          <p:cNvPr id="4" name="Date Placeholder 3"/>
           <p:cNvSpPr>
             <a:spLocks noGrp="1"/>
           </p:cNvSpPr>
@@ -1142,7 +1019,7 @@
           <a:p>
             <a:fld id="{E759A0DE-F190-5444-87AC-4719D5F20D15}" type="datetimeFigureOut">
               <a:rPr lang="en-US" smtClean="0"/>
-              <a:t>6/3/26</a:t>
+              <a:t>6/11/26</a:t>
             </a:fld>
             <a:endParaRPr lang="en-US"/>
           </a:p>
@@ -1150,13 +1027,7 @@
       </p:sp>
       <p:sp>
         <p:nvSpPr>
-          <p:cNvPr id="5" name="Footer Placeholder 4">
-            <a:extLst>
-              <a:ext uri="{FF2B5EF4-FFF2-40B4-BE49-F238E27FC236}">
-                <a16:creationId xmlns:a16="http://schemas.microsoft.com/office/drawing/2014/main" id="{0DC033CF-70D2-4EFC-5477-15F7486A8F3C}"/>
-              </a:ext>
-            </a:extLst>
-          </p:cNvPr>
+          <p:cNvPr id="5" name="Footer Placeholder 4"/>
           <p:cNvSpPr>
             <a:spLocks noGrp="1"/>
           </p:cNvSpPr>
@@ -1175,13 +1046,7 @@
       </p:sp>
       <p:sp>
         <p:nvSpPr>
-          <p:cNvPr id="6" name="Slide Number Placeholder 5">
-            <a:extLst>
-              <a:ext uri="{FF2B5EF4-FFF2-40B4-BE49-F238E27FC236}">
-                <a16:creationId xmlns:a16="http://schemas.microsoft.com/office/drawing/2014/main" id="{797ECCF9-ED4E-20EE-67CD-F55D0D853A8C}"/>
-              </a:ext>
-            </a:extLst>
-          </p:cNvPr>
+          <p:cNvPr id="6" name="Slide Number Placeholder 5"/>
           <p:cNvSpPr>
             <a:spLocks noGrp="1"/>
           </p:cNvSpPr>
@@ -1205,7 +1070,7 @@
     </p:spTree>
     <p:extLst>
       <p:ext uri="{BB962C8B-B14F-4D97-AF65-F5344CB8AC3E}">
-        <p14:creationId xmlns:p14="http://schemas.microsoft.com/office/powerpoint/2010/main" val="3736666041"/>
+        <p14:creationId xmlns:p14="http://schemas.microsoft.com/office/powerpoint/2010/main" val="1561326070"/>
       </p:ext>
     </p:extLst>
   </p:cSld>
@@ -1234,13 +1099,7 @@
       </p:grpSpPr>
       <p:sp>
         <p:nvSpPr>
-          <p:cNvPr id="2" name="Title 1">
-            <a:extLst>
-              <a:ext uri="{FF2B5EF4-FFF2-40B4-BE49-F238E27FC236}">
-                <a16:creationId xmlns:a16="http://schemas.microsoft.com/office/drawing/2014/main" id="{74DD7124-6407-E388-DFAC-CEAEF342D72D}"/>
-              </a:ext>
-            </a:extLst>
-          </p:cNvPr>
+          <p:cNvPr id="2" name="Title 1"/>
           <p:cNvSpPr>
             <a:spLocks noGrp="1"/>
           </p:cNvSpPr>
@@ -1257,18 +1116,13 @@
               <a:rPr lang="en-US"/>
               <a:t>Click to edit Master title style</a:t>
             </a:r>
-          </a:p>
-        </p:txBody>
-      </p:sp>
-      <p:sp>
-        <p:nvSpPr>
-          <p:cNvPr id="3" name="Content Placeholder 2">
-            <a:extLst>
-              <a:ext uri="{FF2B5EF4-FFF2-40B4-BE49-F238E27FC236}">
-                <a16:creationId xmlns:a16="http://schemas.microsoft.com/office/drawing/2014/main" id="{0354C6C2-33DA-0102-6360-654F993BD701}"/>
-              </a:ext>
-            </a:extLst>
-          </p:cNvPr>
+            <a:endParaRPr lang="en-US" dirty="0"/>
+          </a:p>
+        </p:txBody>
+      </p:sp>
+      <p:sp>
+        <p:nvSpPr>
+          <p:cNvPr id="3" name="Content Placeholder 2"/>
           <p:cNvSpPr>
             <a:spLocks noGrp="1"/>
           </p:cNvSpPr>
@@ -1278,8 +1132,8 @@
         </p:nvSpPr>
         <p:spPr>
           <a:xfrm>
-            <a:off x="838200" y="1825625"/>
-            <a:ext cx="5181600" cy="4351338"/>
+            <a:off x="628650" y="1825625"/>
+            <a:ext cx="3886200" cy="4351338"/>
           </a:xfrm>
         </p:spPr>
         <p:txBody>
@@ -1319,18 +1173,13 @@
               <a:rPr lang="en-US"/>
               <a:t>Fifth level</a:t>
             </a:r>
-          </a:p>
-        </p:txBody>
-      </p:sp>
-      <p:sp>
-        <p:nvSpPr>
-          <p:cNvPr id="4" name="Content Placeholder 3">
-            <a:extLst>
-              <a:ext uri="{FF2B5EF4-FFF2-40B4-BE49-F238E27FC236}">
-                <a16:creationId xmlns:a16="http://schemas.microsoft.com/office/drawing/2014/main" id="{EE2B2A58-052B-B454-9932-012243039D08}"/>
-              </a:ext>
-            </a:extLst>
-          </p:cNvPr>
+            <a:endParaRPr lang="en-US" dirty="0"/>
+          </a:p>
+        </p:txBody>
+      </p:sp>
+      <p:sp>
+        <p:nvSpPr>
+          <p:cNvPr id="4" name="Content Placeholder 3"/>
           <p:cNvSpPr>
             <a:spLocks noGrp="1"/>
           </p:cNvSpPr>
@@ -1340,8 +1189,8 @@
         </p:nvSpPr>
         <p:spPr>
           <a:xfrm>
-            <a:off x="6172200" y="1825625"/>
-            <a:ext cx="5181600" cy="4351338"/>
+            <a:off x="4629150" y="1825625"/>
+            <a:ext cx="3886200" cy="4351338"/>
           </a:xfrm>
         </p:spPr>
         <p:txBody>
@@ -1381,18 +1230,13 @@
               <a:rPr lang="en-US"/>
               <a:t>Fifth level</a:t>
             </a:r>
-          </a:p>
-        </p:txBody>
-      </p:sp>
-      <p:sp>
-        <p:nvSpPr>
-          <p:cNvPr id="5" name="Date Placeholder 4">
-            <a:extLst>
-              <a:ext uri="{FF2B5EF4-FFF2-40B4-BE49-F238E27FC236}">
-                <a16:creationId xmlns:a16="http://schemas.microsoft.com/office/drawing/2014/main" id="{52B92D04-ECBD-D55F-A459-4C28DF6A8C2E}"/>
-              </a:ext>
-            </a:extLst>
-          </p:cNvPr>
+            <a:endParaRPr lang="en-US" dirty="0"/>
+          </a:p>
+        </p:txBody>
+      </p:sp>
+      <p:sp>
+        <p:nvSpPr>
+          <p:cNvPr id="5" name="Date Placeholder 4"/>
           <p:cNvSpPr>
             <a:spLocks noGrp="1"/>
           </p:cNvSpPr>
@@ -1407,7 +1251,7 @@
           <a:p>
             <a:fld id="{E759A0DE-F190-5444-87AC-4719D5F20D15}" type="datetimeFigureOut">
               <a:rPr lang="en-US" smtClean="0"/>
-              <a:t>6/3/26</a:t>
+              <a:t>6/11/26</a:t>
             </a:fld>
             <a:endParaRPr lang="en-US"/>
           </a:p>
@@ -1415,13 +1259,7 @@
       </p:sp>
       <p:sp>
         <p:nvSpPr>
-          <p:cNvPr id="6" name="Footer Placeholder 5">
-            <a:extLst>
-              <a:ext uri="{FF2B5EF4-FFF2-40B4-BE49-F238E27FC236}">
-                <a16:creationId xmlns:a16="http://schemas.microsoft.com/office/drawing/2014/main" id="{DF69ACAC-11AF-A864-BD18-A4B426A4AA03}"/>
-              </a:ext>
-            </a:extLst>
-          </p:cNvPr>
+          <p:cNvPr id="6" name="Footer Placeholder 5"/>
           <p:cNvSpPr>
             <a:spLocks noGrp="1"/>
           </p:cNvSpPr>
@@ -1440,13 +1278,7 @@
       </p:sp>
       <p:sp>
         <p:nvSpPr>
-          <p:cNvPr id="7" name="Slide Number Placeholder 6">
-            <a:extLst>
-              <a:ext uri="{FF2B5EF4-FFF2-40B4-BE49-F238E27FC236}">
-                <a16:creationId xmlns:a16="http://schemas.microsoft.com/office/drawing/2014/main" id="{3A3C5DAC-E196-CEC3-6A6B-376BB3F37D19}"/>
-              </a:ext>
-            </a:extLst>
-          </p:cNvPr>
+          <p:cNvPr id="7" name="Slide Number Placeholder 6"/>
           <p:cNvSpPr>
             <a:spLocks noGrp="1"/>
           </p:cNvSpPr>
@@ -1470,7 +1302,7 @@
     </p:spTree>
     <p:extLst>
       <p:ext uri="{BB962C8B-B14F-4D97-AF65-F5344CB8AC3E}">
-        <p14:creationId xmlns:p14="http://schemas.microsoft.com/office/powerpoint/2010/main" val="621302458"/>
+        <p14:creationId xmlns:p14="http://schemas.microsoft.com/office/powerpoint/2010/main" val="523652875"/>
       </p:ext>
     </p:extLst>
   </p:cSld>
@@ -1499,13 +1331,7 @@
       </p:grpSpPr>
       <p:sp>
         <p:nvSpPr>
-          <p:cNvPr id="2" name="Title 1">
-            <a:extLst>
-              <a:ext uri="{FF2B5EF4-FFF2-40B4-BE49-F238E27FC236}">
-                <a16:creationId xmlns:a16="http://schemas.microsoft.com/office/drawing/2014/main" id="{0C632820-190D-235F-CEAA-9558C5413BC1}"/>
-              </a:ext>
-            </a:extLst>
-          </p:cNvPr>
+          <p:cNvPr id="2" name="Title 1"/>
           <p:cNvSpPr>
             <a:spLocks noGrp="1"/>
           </p:cNvSpPr>
@@ -1515,8 +1341,8 @@
         </p:nvSpPr>
         <p:spPr>
           <a:xfrm>
-            <a:off x="839788" y="365125"/>
-            <a:ext cx="10515600" cy="1325563"/>
+            <a:off x="629841" y="365126"/>
+            <a:ext cx="7886700" cy="1325563"/>
           </a:xfrm>
         </p:spPr>
         <p:txBody>
@@ -1527,18 +1353,13 @@
               <a:rPr lang="en-US"/>
               <a:t>Click to edit Master title style</a:t>
             </a:r>
-          </a:p>
-        </p:txBody>
-      </p:sp>
-      <p:sp>
-        <p:nvSpPr>
-          <p:cNvPr id="3" name="Text Placeholder 2">
-            <a:extLst>
-              <a:ext uri="{FF2B5EF4-FFF2-40B4-BE49-F238E27FC236}">
-                <a16:creationId xmlns:a16="http://schemas.microsoft.com/office/drawing/2014/main" id="{16693254-6651-D942-4099-84C9B6A31CF3}"/>
-              </a:ext>
-            </a:extLst>
-          </p:cNvPr>
+            <a:endParaRPr lang="en-US" dirty="0"/>
+          </a:p>
+        </p:txBody>
+      </p:sp>
+      <p:sp>
+        <p:nvSpPr>
+          <p:cNvPr id="3" name="Text Placeholder 2"/>
           <p:cNvSpPr>
             <a:spLocks noGrp="1"/>
           </p:cNvSpPr>
@@ -1548,8 +1369,8 @@
         </p:nvSpPr>
         <p:spPr>
           <a:xfrm>
-            <a:off x="839788" y="1681163"/>
-            <a:ext cx="5157787" cy="823912"/>
+            <a:off x="629842" y="1681163"/>
+            <a:ext cx="3868340" cy="823912"/>
           </a:xfrm>
         </p:spPr>
         <p:txBody>
@@ -1603,13 +1424,7 @@
       </p:sp>
       <p:sp>
         <p:nvSpPr>
-          <p:cNvPr id="4" name="Content Placeholder 3">
-            <a:extLst>
-              <a:ext uri="{FF2B5EF4-FFF2-40B4-BE49-F238E27FC236}">
-                <a16:creationId xmlns:a16="http://schemas.microsoft.com/office/drawing/2014/main" id="{D6D4DAC3-CF47-11DC-83E8-0B1192A4422A}"/>
-              </a:ext>
-            </a:extLst>
-          </p:cNvPr>
+          <p:cNvPr id="4" name="Content Placeholder 3"/>
           <p:cNvSpPr>
             <a:spLocks noGrp="1"/>
           </p:cNvSpPr>
@@ -1619,8 +1434,8 @@
         </p:nvSpPr>
         <p:spPr>
           <a:xfrm>
-            <a:off x="839788" y="2505075"/>
-            <a:ext cx="5157787" cy="3684588"/>
+            <a:off x="629842" y="2505075"/>
+            <a:ext cx="3868340" cy="3684588"/>
           </a:xfrm>
         </p:spPr>
         <p:txBody>
@@ -1660,18 +1475,13 @@
               <a:rPr lang="en-US"/>
               <a:t>Fifth level</a:t>
             </a:r>
-          </a:p>
-        </p:txBody>
-      </p:sp>
-      <p:sp>
-        <p:nvSpPr>
-          <p:cNvPr id="5" name="Text Placeholder 4">
-            <a:extLst>
-              <a:ext uri="{FF2B5EF4-FFF2-40B4-BE49-F238E27FC236}">
-                <a16:creationId xmlns:a16="http://schemas.microsoft.com/office/drawing/2014/main" id="{3C49067B-AD0F-C796-4C8F-C043DB6FD3B3}"/>
-              </a:ext>
-            </a:extLst>
-          </p:cNvPr>
+            <a:endParaRPr lang="en-US" dirty="0"/>
+          </a:p>
+        </p:txBody>
+      </p:sp>
+      <p:sp>
+        <p:nvSpPr>
+          <p:cNvPr id="5" name="Text Placeholder 4"/>
           <p:cNvSpPr>
             <a:spLocks noGrp="1"/>
           </p:cNvSpPr>
@@ -1681,8 +1491,8 @@
         </p:nvSpPr>
         <p:spPr>
           <a:xfrm>
-            <a:off x="6172200" y="1681163"/>
-            <a:ext cx="5183188" cy="823912"/>
+            <a:off x="4629150" y="1681163"/>
+            <a:ext cx="3887391" cy="823912"/>
           </a:xfrm>
         </p:spPr>
         <p:txBody>
@@ -1736,13 +1546,7 @@
       </p:sp>
       <p:sp>
         <p:nvSpPr>
-          <p:cNvPr id="6" name="Content Placeholder 5">
-            <a:extLst>
-              <a:ext uri="{FF2B5EF4-FFF2-40B4-BE49-F238E27FC236}">
-                <a16:creationId xmlns:a16="http://schemas.microsoft.com/office/drawing/2014/main" id="{A4D0695B-675B-E8DD-D931-29E639B3E559}"/>
-              </a:ext>
-            </a:extLst>
-          </p:cNvPr>
+          <p:cNvPr id="6" name="Content Placeholder 5"/>
           <p:cNvSpPr>
             <a:spLocks noGrp="1"/>
           </p:cNvSpPr>
@@ -1752,8 +1556,8 @@
         </p:nvSpPr>
         <p:spPr>
           <a:xfrm>
-            <a:off x="6172200" y="2505075"/>
-            <a:ext cx="5183188" cy="3684588"/>
+            <a:off x="4629150" y="2505075"/>
+            <a:ext cx="3887391" cy="3684588"/>
           </a:xfrm>
         </p:spPr>
         <p:txBody>
@@ -1793,18 +1597,13 @@
               <a:rPr lang="en-US"/>
               <a:t>Fifth level</a:t>
             </a:r>
-          </a:p>
-        </p:txBody>
-      </p:sp>
-      <p:sp>
-        <p:nvSpPr>
-          <p:cNvPr id="7" name="Date Placeholder 6">
-            <a:extLst>
-              <a:ext uri="{FF2B5EF4-FFF2-40B4-BE49-F238E27FC236}">
-                <a16:creationId xmlns:a16="http://schemas.microsoft.com/office/drawing/2014/main" id="{E7F5423C-A80C-353A-6ADA-AD2195CCE83B}"/>
-              </a:ext>
-            </a:extLst>
-          </p:cNvPr>
+            <a:endParaRPr lang="en-US" dirty="0"/>
+          </a:p>
+        </p:txBody>
+      </p:sp>
+      <p:sp>
+        <p:nvSpPr>
+          <p:cNvPr id="7" name="Date Placeholder 6"/>
           <p:cNvSpPr>
             <a:spLocks noGrp="1"/>
           </p:cNvSpPr>
@@ -1819,7 +1618,7 @@
           <a:p>
             <a:fld id="{E759A0DE-F190-5444-87AC-4719D5F20D15}" type="datetimeFigureOut">
               <a:rPr lang="en-US" smtClean="0"/>
-              <a:t>6/3/26</a:t>
+              <a:t>6/11/26</a:t>
             </a:fld>
             <a:endParaRPr lang="en-US"/>
           </a:p>
@@ -1827,13 +1626,7 @@
       </p:sp>
       <p:sp>
         <p:nvSpPr>
-          <p:cNvPr id="8" name="Footer Placeholder 7">
-            <a:extLst>
-              <a:ext uri="{FF2B5EF4-FFF2-40B4-BE49-F238E27FC236}">
-                <a16:creationId xmlns:a16="http://schemas.microsoft.com/office/drawing/2014/main" id="{3154C085-1B7B-06F2-2F97-8BE5AED3D908}"/>
-              </a:ext>
-            </a:extLst>
-          </p:cNvPr>
+          <p:cNvPr id="8" name="Footer Placeholder 7"/>
           <p:cNvSpPr>
             <a:spLocks noGrp="1"/>
           </p:cNvSpPr>
@@ -1852,13 +1645,7 @@
       </p:sp>
       <p:sp>
         <p:nvSpPr>
-          <p:cNvPr id="9" name="Slide Number Placeholder 8">
-            <a:extLst>
-              <a:ext uri="{FF2B5EF4-FFF2-40B4-BE49-F238E27FC236}">
-                <a16:creationId xmlns:a16="http://schemas.microsoft.com/office/drawing/2014/main" id="{A6C6B0A2-57CB-16B8-1E9B-CA6DA6337B35}"/>
-              </a:ext>
-            </a:extLst>
-          </p:cNvPr>
+          <p:cNvPr id="9" name="Slide Number Placeholder 8"/>
           <p:cNvSpPr>
             <a:spLocks noGrp="1"/>
           </p:cNvSpPr>
@@ -1882,7 +1669,7 @@
     </p:spTree>
     <p:extLst>
       <p:ext uri="{BB962C8B-B14F-4D97-AF65-F5344CB8AC3E}">
-        <p14:creationId xmlns:p14="http://schemas.microsoft.com/office/powerpoint/2010/main" val="3902579014"/>
+        <p14:creationId xmlns:p14="http://schemas.microsoft.com/office/powerpoint/2010/main" val="1191678204"/>
       </p:ext>
     </p:extLst>
   </p:cSld>
@@ -1911,13 +1698,7 @@
       </p:grpSpPr>
       <p:sp>
         <p:nvSpPr>
-          <p:cNvPr id="2" name="Title 1">
-            <a:extLst>
-              <a:ext uri="{FF2B5EF4-FFF2-40B4-BE49-F238E27FC236}">
-                <a16:creationId xmlns:a16="http://schemas.microsoft.com/office/drawing/2014/main" id="{42014C2D-A9C6-E4FF-86E0-53926609620A}"/>
-              </a:ext>
-            </a:extLst>
-          </p:cNvPr>
+          <p:cNvPr id="2" name="Title 1"/>
           <p:cNvSpPr>
             <a:spLocks noGrp="1"/>
           </p:cNvSpPr>
@@ -1934,18 +1715,13 @@
               <a:rPr lang="en-US"/>
               <a:t>Click to edit Master title style</a:t>
             </a:r>
-          </a:p>
-        </p:txBody>
-      </p:sp>
-      <p:sp>
-        <p:nvSpPr>
-          <p:cNvPr id="3" name="Date Placeholder 2">
-            <a:extLst>
-              <a:ext uri="{FF2B5EF4-FFF2-40B4-BE49-F238E27FC236}">
-                <a16:creationId xmlns:a16="http://schemas.microsoft.com/office/drawing/2014/main" id="{CAEBDED3-8FA2-E14E-6132-DBF06C0043E9}"/>
-              </a:ext>
-            </a:extLst>
-          </p:cNvPr>
+            <a:endParaRPr lang="en-US" dirty="0"/>
+          </a:p>
+        </p:txBody>
+      </p:sp>
+      <p:sp>
+        <p:nvSpPr>
+          <p:cNvPr id="3" name="Date Placeholder 2"/>
           <p:cNvSpPr>
             <a:spLocks noGrp="1"/>
           </p:cNvSpPr>
@@ -1960,7 +1736,7 @@
           <a:p>
             <a:fld id="{E759A0DE-F190-5444-87AC-4719D5F20D15}" type="datetimeFigureOut">
               <a:rPr lang="en-US" smtClean="0"/>
-              <a:t>6/3/26</a:t>
+              <a:t>6/11/26</a:t>
             </a:fld>
             <a:endParaRPr lang="en-US"/>
           </a:p>
@@ -1968,13 +1744,7 @@
       </p:sp>
       <p:sp>
         <p:nvSpPr>
-          <p:cNvPr id="4" name="Footer Placeholder 3">
-            <a:extLst>
-              <a:ext uri="{FF2B5EF4-FFF2-40B4-BE49-F238E27FC236}">
-                <a16:creationId xmlns:a16="http://schemas.microsoft.com/office/drawing/2014/main" id="{24FF1715-78D0-6155-47B7-64F32ECF5F55}"/>
-              </a:ext>
-            </a:extLst>
-          </p:cNvPr>
+          <p:cNvPr id="4" name="Footer Placeholder 3"/>
           <p:cNvSpPr>
             <a:spLocks noGrp="1"/>
           </p:cNvSpPr>
@@ -1993,13 +1763,7 @@
       </p:sp>
       <p:sp>
         <p:nvSpPr>
-          <p:cNvPr id="5" name="Slide Number Placeholder 4">
-            <a:extLst>
-              <a:ext uri="{FF2B5EF4-FFF2-40B4-BE49-F238E27FC236}">
-                <a16:creationId xmlns:a16="http://schemas.microsoft.com/office/drawing/2014/main" id="{95EE70D1-30EB-D2A6-F6C0-29E5A0681277}"/>
-              </a:ext>
-            </a:extLst>
-          </p:cNvPr>
+          <p:cNvPr id="5" name="Slide Number Placeholder 4"/>
           <p:cNvSpPr>
             <a:spLocks noGrp="1"/>
           </p:cNvSpPr>
@@ -2023,7 +1787,7 @@
     </p:spTree>
     <p:extLst>
       <p:ext uri="{BB962C8B-B14F-4D97-AF65-F5344CB8AC3E}">
-        <p14:creationId xmlns:p14="http://schemas.microsoft.com/office/powerpoint/2010/main" val="2762667879"/>
+        <p14:creationId xmlns:p14="http://schemas.microsoft.com/office/powerpoint/2010/main" val="1119819874"/>
       </p:ext>
     </p:extLst>
   </p:cSld>
@@ -2052,13 +1816,7 @@
       </p:grpSpPr>
       <p:sp>
         <p:nvSpPr>
-          <p:cNvPr id="2" name="Date Placeholder 1">
-            <a:extLst>
-              <a:ext uri="{FF2B5EF4-FFF2-40B4-BE49-F238E27FC236}">
-                <a16:creationId xmlns:a16="http://schemas.microsoft.com/office/drawing/2014/main" id="{9CD2DAB5-6AD5-15BC-026B-B80E34678399}"/>
-              </a:ext>
-            </a:extLst>
-          </p:cNvPr>
+          <p:cNvPr id="2" name="Date Placeholder 1"/>
           <p:cNvSpPr>
             <a:spLocks noGrp="1"/>
           </p:cNvSpPr>
@@ -2073,7 +1831,7 @@
           <a:p>
             <a:fld id="{E759A0DE-F190-5444-87AC-4719D5F20D15}" type="datetimeFigureOut">
               <a:rPr lang="en-US" smtClean="0"/>
-              <a:t>6/3/26</a:t>
+              <a:t>6/11/26</a:t>
             </a:fld>
             <a:endParaRPr lang="en-US"/>
           </a:p>
@@ -2081,13 +1839,7 @@
       </p:sp>
       <p:sp>
         <p:nvSpPr>
-          <p:cNvPr id="3" name="Footer Placeholder 2">
-            <a:extLst>
-              <a:ext uri="{FF2B5EF4-FFF2-40B4-BE49-F238E27FC236}">
-                <a16:creationId xmlns:a16="http://schemas.microsoft.com/office/drawing/2014/main" id="{919D2783-D2E4-47AE-70D6-B4A209E13CBC}"/>
-              </a:ext>
-            </a:extLst>
-          </p:cNvPr>
+          <p:cNvPr id="3" name="Footer Placeholder 2"/>
           <p:cNvSpPr>
             <a:spLocks noGrp="1"/>
           </p:cNvSpPr>
@@ -2106,13 +1858,7 @@
       </p:sp>
       <p:sp>
         <p:nvSpPr>
-          <p:cNvPr id="4" name="Slide Number Placeholder 3">
-            <a:extLst>
-              <a:ext uri="{FF2B5EF4-FFF2-40B4-BE49-F238E27FC236}">
-                <a16:creationId xmlns:a16="http://schemas.microsoft.com/office/drawing/2014/main" id="{009A41F5-9D51-17BE-FB49-C0DC79F1FB33}"/>
-              </a:ext>
-            </a:extLst>
-          </p:cNvPr>
+          <p:cNvPr id="4" name="Slide Number Placeholder 3"/>
           <p:cNvSpPr>
             <a:spLocks noGrp="1"/>
           </p:cNvSpPr>
@@ -2136,7 +1882,7 @@
     </p:spTree>
     <p:extLst>
       <p:ext uri="{BB962C8B-B14F-4D97-AF65-F5344CB8AC3E}">
-        <p14:creationId xmlns:p14="http://schemas.microsoft.com/office/powerpoint/2010/main" val="684399818"/>
+        <p14:creationId xmlns:p14="http://schemas.microsoft.com/office/powerpoint/2010/main" val="3459715689"/>
       </p:ext>
     </p:extLst>
   </p:cSld>
@@ -2165,13 +1911,7 @@
       </p:grpSpPr>
       <p:sp>
         <p:nvSpPr>
-          <p:cNvPr id="2" name="Title 1">
-            <a:extLst>
-              <a:ext uri="{FF2B5EF4-FFF2-40B4-BE49-F238E27FC236}">
-                <a16:creationId xmlns:a16="http://schemas.microsoft.com/office/drawing/2014/main" id="{636535ED-82D6-0936-3EEB-AD9435F5EDC9}"/>
-              </a:ext>
-            </a:extLst>
-          </p:cNvPr>
+          <p:cNvPr id="2" name="Title 1"/>
           <p:cNvSpPr>
             <a:spLocks noGrp="1"/>
           </p:cNvSpPr>
@@ -2181,8 +1921,8 @@
         </p:nvSpPr>
         <p:spPr>
           <a:xfrm>
-            <a:off x="839788" y="457200"/>
-            <a:ext cx="3932237" cy="1600200"/>
+            <a:off x="629841" y="457200"/>
+            <a:ext cx="2949178" cy="1600200"/>
           </a:xfrm>
         </p:spPr>
         <p:txBody>
@@ -2197,18 +1937,13 @@
               <a:rPr lang="en-US"/>
               <a:t>Click to edit Master title style</a:t>
             </a:r>
-          </a:p>
-        </p:txBody>
-      </p:sp>
-      <p:sp>
-        <p:nvSpPr>
-          <p:cNvPr id="3" name="Content Placeholder 2">
-            <a:extLst>
-              <a:ext uri="{FF2B5EF4-FFF2-40B4-BE49-F238E27FC236}">
-                <a16:creationId xmlns:a16="http://schemas.microsoft.com/office/drawing/2014/main" id="{1803B2A4-A7AB-CDB0-D7F1-279536A2702A}"/>
-              </a:ext>
-            </a:extLst>
-          </p:cNvPr>
+            <a:endParaRPr lang="en-US" dirty="0"/>
+          </a:p>
+        </p:txBody>
+      </p:sp>
+      <p:sp>
+        <p:nvSpPr>
+          <p:cNvPr id="3" name="Content Placeholder 2"/>
           <p:cNvSpPr>
             <a:spLocks noGrp="1"/>
           </p:cNvSpPr>
@@ -2218,8 +1953,8 @@
         </p:nvSpPr>
         <p:spPr>
           <a:xfrm>
-            <a:off x="5183188" y="987425"/>
-            <a:ext cx="6172200" cy="4873625"/>
+            <a:off x="3887391" y="987426"/>
+            <a:ext cx="4629150" cy="4873625"/>
           </a:xfrm>
         </p:spPr>
         <p:txBody>
@@ -2287,18 +2022,13 @@
               <a:rPr lang="en-US"/>
               <a:t>Fifth level</a:t>
             </a:r>
-          </a:p>
-        </p:txBody>
-      </p:sp>
-      <p:sp>
-        <p:nvSpPr>
-          <p:cNvPr id="4" name="Text Placeholder 3">
-            <a:extLst>
-              <a:ext uri="{FF2B5EF4-FFF2-40B4-BE49-F238E27FC236}">
-                <a16:creationId xmlns:a16="http://schemas.microsoft.com/office/drawing/2014/main" id="{3329566A-3ACC-2A16-1AAE-6B0281DB7E3C}"/>
-              </a:ext>
-            </a:extLst>
-          </p:cNvPr>
+            <a:endParaRPr lang="en-US" dirty="0"/>
+          </a:p>
+        </p:txBody>
+      </p:sp>
+      <p:sp>
+        <p:nvSpPr>
+          <p:cNvPr id="4" name="Text Placeholder 3"/>
           <p:cNvSpPr>
             <a:spLocks noGrp="1"/>
           </p:cNvSpPr>
@@ -2308,8 +2038,8 @@
         </p:nvSpPr>
         <p:spPr>
           <a:xfrm>
-            <a:off x="839788" y="2057400"/>
-            <a:ext cx="3932237" cy="3811588"/>
+            <a:off x="629841" y="2057400"/>
+            <a:ext cx="2949178" cy="3811588"/>
           </a:xfrm>
         </p:spPr>
         <p:txBody>
@@ -2363,13 +2093,7 @@
       </p:sp>
       <p:sp>
         <p:nvSpPr>
-          <p:cNvPr id="5" name="Date Placeholder 4">
-            <a:extLst>
-              <a:ext uri="{FF2B5EF4-FFF2-40B4-BE49-F238E27FC236}">
-                <a16:creationId xmlns:a16="http://schemas.microsoft.com/office/drawing/2014/main" id="{453518F2-2B74-8F2D-171A-15986F3C5152}"/>
-              </a:ext>
-            </a:extLst>
-          </p:cNvPr>
+          <p:cNvPr id="5" name="Date Placeholder 4"/>
           <p:cNvSpPr>
             <a:spLocks noGrp="1"/>
           </p:cNvSpPr>
@@ -2384,7 +2108,7 @@
           <a:p>
             <a:fld id="{E759A0DE-F190-5444-87AC-4719D5F20D15}" type="datetimeFigureOut">
               <a:rPr lang="en-US" smtClean="0"/>
-              <a:t>6/3/26</a:t>
+              <a:t>6/11/26</a:t>
             </a:fld>
             <a:endParaRPr lang="en-US"/>
           </a:p>
@@ -2392,13 +2116,7 @@
       </p:sp>
       <p:sp>
         <p:nvSpPr>
-          <p:cNvPr id="6" name="Footer Placeholder 5">
-            <a:extLst>
-              <a:ext uri="{FF2B5EF4-FFF2-40B4-BE49-F238E27FC236}">
-                <a16:creationId xmlns:a16="http://schemas.microsoft.com/office/drawing/2014/main" id="{6DF8701B-4899-C3D0-CB2F-6C31378A510F}"/>
-              </a:ext>
-            </a:extLst>
-          </p:cNvPr>
+          <p:cNvPr id="6" name="Footer Placeholder 5"/>
           <p:cNvSpPr>
             <a:spLocks noGrp="1"/>
           </p:cNvSpPr>
@@ -2417,13 +2135,7 @@
       </p:sp>
       <p:sp>
         <p:nvSpPr>
-          <p:cNvPr id="7" name="Slide Number Placeholder 6">
-            <a:extLst>
-              <a:ext uri="{FF2B5EF4-FFF2-40B4-BE49-F238E27FC236}">
-                <a16:creationId xmlns:a16="http://schemas.microsoft.com/office/drawing/2014/main" id="{F3240FD0-A8F8-EFCD-2A69-21AB0FB076F6}"/>
-              </a:ext>
-            </a:extLst>
-          </p:cNvPr>
+          <p:cNvPr id="7" name="Slide Number Placeholder 6"/>
           <p:cNvSpPr>
             <a:spLocks noGrp="1"/>
           </p:cNvSpPr>
@@ -2447,7 +2159,7 @@
     </p:spTree>
     <p:extLst>
       <p:ext uri="{BB962C8B-B14F-4D97-AF65-F5344CB8AC3E}">
-        <p14:creationId xmlns:p14="http://schemas.microsoft.com/office/powerpoint/2010/main" val="2191778824"/>
+        <p14:creationId xmlns:p14="http://schemas.microsoft.com/office/powerpoint/2010/main" val="2626292213"/>
       </p:ext>
     </p:extLst>
   </p:cSld>
@@ -2476,13 +2188,7 @@
       </p:grpSpPr>
       <p:sp>
         <p:nvSpPr>
-          <p:cNvPr id="2" name="Title 1">
-            <a:extLst>
-              <a:ext uri="{FF2B5EF4-FFF2-40B4-BE49-F238E27FC236}">
-                <a16:creationId xmlns:a16="http://schemas.microsoft.com/office/drawing/2014/main" id="{FD43467F-CDAF-BF3C-2E6D-F2EBB52C7E17}"/>
-              </a:ext>
-            </a:extLst>
-          </p:cNvPr>
+          <p:cNvPr id="2" name="Title 1"/>
           <p:cNvSpPr>
             <a:spLocks noGrp="1"/>
           </p:cNvSpPr>
@@ -2492,8 +2198,8 @@
         </p:nvSpPr>
         <p:spPr>
           <a:xfrm>
-            <a:off x="839788" y="457200"/>
-            <a:ext cx="3932237" cy="1600200"/>
+            <a:off x="629841" y="457200"/>
+            <a:ext cx="2949178" cy="1600200"/>
           </a:xfrm>
         </p:spPr>
         <p:txBody>
@@ -2508,20 +2214,15 @@
               <a:rPr lang="en-US"/>
               <a:t>Click to edit Master title style</a:t>
             </a:r>
-          </a:p>
-        </p:txBody>
-      </p:sp>
-      <p:sp>
-        <p:nvSpPr>
-          <p:cNvPr id="3" name="Picture Placeholder 2">
-            <a:extLst>
-              <a:ext uri="{FF2B5EF4-FFF2-40B4-BE49-F238E27FC236}">
-                <a16:creationId xmlns:a16="http://schemas.microsoft.com/office/drawing/2014/main" id="{63D374E6-7653-1FED-90D8-27F8F5A5A555}"/>
-              </a:ext>
-            </a:extLst>
-          </p:cNvPr>
-          <p:cNvSpPr>
-            <a:spLocks noGrp="1"/>
+            <a:endParaRPr lang="en-US" dirty="0"/>
+          </a:p>
+        </p:txBody>
+      </p:sp>
+      <p:sp>
+        <p:nvSpPr>
+          <p:cNvPr id="3" name="Picture Placeholder 2"/>
+          <p:cNvSpPr>
+            <a:spLocks noGrp="1" noChangeAspect="1"/>
           </p:cNvSpPr>
           <p:nvPr>
             <p:ph type="pic" idx="1"/>
@@ -2529,12 +2230,12 @@
         </p:nvSpPr>
         <p:spPr>
           <a:xfrm>
-            <a:off x="5183188" y="987425"/>
-            <a:ext cx="6172200" cy="4873625"/>
+            <a:off x="3887391" y="987426"/>
+            <a:ext cx="4629150" cy="4873625"/>
           </a:xfrm>
         </p:spPr>
         <p:txBody>
-          <a:bodyPr/>
+          <a:bodyPr anchor="t"/>
           <a:lstStyle>
             <a:lvl1pPr marL="0" indent="0">
               <a:buNone/>
@@ -2574,19 +2275,17 @@
             </a:lvl9pPr>
           </a:lstStyle>
           <a:p>
-            <a:endParaRPr lang="en-US"/>
-          </a:p>
-        </p:txBody>
-      </p:sp>
-      <p:sp>
-        <p:nvSpPr>
-          <p:cNvPr id="4" name="Text Placeholder 3">
-            <a:extLst>
-              <a:ext uri="{FF2B5EF4-FFF2-40B4-BE49-F238E27FC236}">
-                <a16:creationId xmlns:a16="http://schemas.microsoft.com/office/drawing/2014/main" id="{9318631D-B68A-86EE-A551-F2FE300250A2}"/>
-              </a:ext>
-            </a:extLst>
-          </p:cNvPr>
+            <a:r>
+              <a:rPr lang="en-US"/>
+              <a:t>Click icon to add picture</a:t>
+            </a:r>
+            <a:endParaRPr lang="en-US" dirty="0"/>
+          </a:p>
+        </p:txBody>
+      </p:sp>
+      <p:sp>
+        <p:nvSpPr>
+          <p:cNvPr id="4" name="Text Placeholder 3"/>
           <p:cNvSpPr>
             <a:spLocks noGrp="1"/>
           </p:cNvSpPr>
@@ -2596,8 +2295,8 @@
         </p:nvSpPr>
         <p:spPr>
           <a:xfrm>
-            <a:off x="839788" y="2057400"/>
-            <a:ext cx="3932237" cy="3811588"/>
+            <a:off x="629841" y="2057400"/>
+            <a:ext cx="2949178" cy="3811588"/>
           </a:xfrm>
         </p:spPr>
         <p:txBody>
@@ -2651,13 +2350,7 @@
       </p:sp>
       <p:sp>
         <p:nvSpPr>
-          <p:cNvPr id="5" name="Date Placeholder 4">
-            <a:extLst>
-              <a:ext uri="{FF2B5EF4-FFF2-40B4-BE49-F238E27FC236}">
-                <a16:creationId xmlns:a16="http://schemas.microsoft.com/office/drawing/2014/main" id="{0CAD5574-CD0C-0EDC-7EA2-BBDDAA07AD36}"/>
-              </a:ext>
-            </a:extLst>
-          </p:cNvPr>
+          <p:cNvPr id="5" name="Date Placeholder 4"/>
           <p:cNvSpPr>
             <a:spLocks noGrp="1"/>
           </p:cNvSpPr>
@@ -2672,7 +2365,7 @@
           <a:p>
             <a:fld id="{E759A0DE-F190-5444-87AC-4719D5F20D15}" type="datetimeFigureOut">
               <a:rPr lang="en-US" smtClean="0"/>
-              <a:t>6/3/26</a:t>
+              <a:t>6/11/26</a:t>
             </a:fld>
             <a:endParaRPr lang="en-US"/>
           </a:p>
@@ -2680,13 +2373,7 @@
       </p:sp>
       <p:sp>
         <p:nvSpPr>
-          <p:cNvPr id="6" name="Footer Placeholder 5">
-            <a:extLst>
-              <a:ext uri="{FF2B5EF4-FFF2-40B4-BE49-F238E27FC236}">
-                <a16:creationId xmlns:a16="http://schemas.microsoft.com/office/drawing/2014/main" id="{C4ADA4F2-15B1-95FF-AFC8-0BCFB4E4E788}"/>
-              </a:ext>
-            </a:extLst>
-          </p:cNvPr>
+          <p:cNvPr id="6" name="Footer Placeholder 5"/>
           <p:cNvSpPr>
             <a:spLocks noGrp="1"/>
           </p:cNvSpPr>
@@ -2705,13 +2392,7 @@
       </p:sp>
       <p:sp>
         <p:nvSpPr>
-          <p:cNvPr id="7" name="Slide Number Placeholder 6">
-            <a:extLst>
-              <a:ext uri="{FF2B5EF4-FFF2-40B4-BE49-F238E27FC236}">
-                <a16:creationId xmlns:a16="http://schemas.microsoft.com/office/drawing/2014/main" id="{5F57356D-53C5-30FE-E0FE-A480BE6A8E8C}"/>
-              </a:ext>
-            </a:extLst>
-          </p:cNvPr>
+          <p:cNvPr id="7" name="Slide Number Placeholder 6"/>
           <p:cNvSpPr>
             <a:spLocks noGrp="1"/>
           </p:cNvSpPr>
@@ -2735,7 +2416,7 @@
     </p:spTree>
     <p:extLst>
       <p:ext uri="{BB962C8B-B14F-4D97-AF65-F5344CB8AC3E}">
-        <p14:creationId xmlns:p14="http://schemas.microsoft.com/office/powerpoint/2010/main" val="3139710704"/>
+        <p14:creationId xmlns:p14="http://schemas.microsoft.com/office/powerpoint/2010/main" val="707543087"/>
       </p:ext>
     </p:extLst>
   </p:cSld>
@@ -2769,13 +2450,7 @@
       </p:grpSpPr>
       <p:sp>
         <p:nvSpPr>
-          <p:cNvPr id="2" name="Title Placeholder 1">
-            <a:extLst>
-              <a:ext uri="{FF2B5EF4-FFF2-40B4-BE49-F238E27FC236}">
-                <a16:creationId xmlns:a16="http://schemas.microsoft.com/office/drawing/2014/main" id="{E707FE23-AD5C-E492-4625-B3FFD7D65D58}"/>
-              </a:ext>
-            </a:extLst>
-          </p:cNvPr>
+          <p:cNvPr id="2" name="Title Placeholder 1"/>
           <p:cNvSpPr>
             <a:spLocks noGrp="1"/>
           </p:cNvSpPr>
@@ -2785,8 +2460,8 @@
         </p:nvSpPr>
         <p:spPr>
           <a:xfrm>
-            <a:off x="838200" y="365125"/>
-            <a:ext cx="10515600" cy="1325563"/>
+            <a:off x="628650" y="365126"/>
+            <a:ext cx="7886700" cy="1325563"/>
           </a:xfrm>
           <a:prstGeom prst="rect">
             <a:avLst/>
@@ -2802,18 +2477,13 @@
               <a:rPr lang="en-US"/>
               <a:t>Click to edit Master title style</a:t>
             </a:r>
-          </a:p>
-        </p:txBody>
-      </p:sp>
-      <p:sp>
-        <p:nvSpPr>
-          <p:cNvPr id="3" name="Text Placeholder 2">
-            <a:extLst>
-              <a:ext uri="{FF2B5EF4-FFF2-40B4-BE49-F238E27FC236}">
-                <a16:creationId xmlns:a16="http://schemas.microsoft.com/office/drawing/2014/main" id="{5935509A-545F-6691-9119-47A073D0143B}"/>
-              </a:ext>
-            </a:extLst>
-          </p:cNvPr>
+            <a:endParaRPr lang="en-US" dirty="0"/>
+          </a:p>
+        </p:txBody>
+      </p:sp>
+      <p:sp>
+        <p:nvSpPr>
+          <p:cNvPr id="3" name="Text Placeholder 2"/>
           <p:cNvSpPr>
             <a:spLocks noGrp="1"/>
           </p:cNvSpPr>
@@ -2823,8 +2493,8 @@
         </p:nvSpPr>
         <p:spPr>
           <a:xfrm>
-            <a:off x="838200" y="1825625"/>
-            <a:ext cx="10515600" cy="4351338"/>
+            <a:off x="628650" y="1825625"/>
+            <a:ext cx="7886700" cy="4351338"/>
           </a:xfrm>
           <a:prstGeom prst="rect">
             <a:avLst/>
@@ -2869,18 +2539,13 @@
               <a:rPr lang="en-US"/>
               <a:t>Fifth level</a:t>
             </a:r>
-          </a:p>
-        </p:txBody>
-      </p:sp>
-      <p:sp>
-        <p:nvSpPr>
-          <p:cNvPr id="4" name="Date Placeholder 3">
-            <a:extLst>
-              <a:ext uri="{FF2B5EF4-FFF2-40B4-BE49-F238E27FC236}">
-                <a16:creationId xmlns:a16="http://schemas.microsoft.com/office/drawing/2014/main" id="{B48FCAAE-1AD5-9CBF-A0F6-52A814732FD0}"/>
-              </a:ext>
-            </a:extLst>
-          </p:cNvPr>
+            <a:endParaRPr lang="en-US" dirty="0"/>
+          </a:p>
+        </p:txBody>
+      </p:sp>
+      <p:sp>
+        <p:nvSpPr>
+          <p:cNvPr id="4" name="Date Placeholder 3"/>
           <p:cNvSpPr>
             <a:spLocks noGrp="1"/>
           </p:cNvSpPr>
@@ -2890,8 +2555,8 @@
         </p:nvSpPr>
         <p:spPr>
           <a:xfrm>
-            <a:off x="838200" y="6356350"/>
-            <a:ext cx="2743200" cy="365125"/>
+            <a:off x="628650" y="6356351"/>
+            <a:ext cx="2057400" cy="365125"/>
           </a:xfrm>
           <a:prstGeom prst="rect">
             <a:avLst/>
@@ -2913,7 +2578,7 @@
           <a:p>
             <a:fld id="{E759A0DE-F190-5444-87AC-4719D5F20D15}" type="datetimeFigureOut">
               <a:rPr lang="en-US" smtClean="0"/>
-              <a:t>6/3/26</a:t>
+              <a:t>6/11/26</a:t>
             </a:fld>
             <a:endParaRPr lang="en-US"/>
           </a:p>
@@ -2921,13 +2586,7 @@
       </p:sp>
       <p:sp>
         <p:nvSpPr>
-          <p:cNvPr id="5" name="Footer Placeholder 4">
-            <a:extLst>
-              <a:ext uri="{FF2B5EF4-FFF2-40B4-BE49-F238E27FC236}">
-                <a16:creationId xmlns:a16="http://schemas.microsoft.com/office/drawing/2014/main" id="{22229717-0F21-BE11-1F19-88106B640856}"/>
-              </a:ext>
-            </a:extLst>
-          </p:cNvPr>
+          <p:cNvPr id="5" name="Footer Placeholder 4"/>
           <p:cNvSpPr>
             <a:spLocks noGrp="1"/>
           </p:cNvSpPr>
@@ -2937,8 +2596,8 @@
         </p:nvSpPr>
         <p:spPr>
           <a:xfrm>
-            <a:off x="4038600" y="6356350"/>
-            <a:ext cx="4114800" cy="365125"/>
+            <a:off x="3028950" y="6356351"/>
+            <a:ext cx="3086100" cy="365125"/>
           </a:xfrm>
           <a:prstGeom prst="rect">
             <a:avLst/>
@@ -2964,13 +2623,7 @@
       </p:sp>
       <p:sp>
         <p:nvSpPr>
-          <p:cNvPr id="6" name="Slide Number Placeholder 5">
-            <a:extLst>
-              <a:ext uri="{FF2B5EF4-FFF2-40B4-BE49-F238E27FC236}">
-                <a16:creationId xmlns:a16="http://schemas.microsoft.com/office/drawing/2014/main" id="{3858A247-FF8D-F68A-7E74-66F74B44BB8E}"/>
-              </a:ext>
-            </a:extLst>
-          </p:cNvPr>
+          <p:cNvPr id="6" name="Slide Number Placeholder 5"/>
           <p:cNvSpPr>
             <a:spLocks noGrp="1"/>
           </p:cNvSpPr>
@@ -2980,8 +2633,8 @@
         </p:nvSpPr>
         <p:spPr>
           <a:xfrm>
-            <a:off x="8610600" y="6356350"/>
-            <a:ext cx="2743200" cy="365125"/>
+            <a:off x="6457950" y="6356351"/>
+            <a:ext cx="2057400" cy="365125"/>
           </a:xfrm>
           <a:prstGeom prst="rect">
             <a:avLst/>
@@ -3012,23 +2665,23 @@
     </p:spTree>
     <p:extLst>
       <p:ext uri="{BB962C8B-B14F-4D97-AF65-F5344CB8AC3E}">
-        <p14:creationId xmlns:p14="http://schemas.microsoft.com/office/powerpoint/2010/main" val="3785378211"/>
+        <p14:creationId xmlns:p14="http://schemas.microsoft.com/office/powerpoint/2010/main" val="4273318330"/>
       </p:ext>
     </p:extLst>
   </p:cSld>
   <p:clrMap bg1="lt1" tx1="dk1" bg2="lt2" tx2="dk2" accent1="accent1" accent2="accent2" accent3="accent3" accent4="accent4" accent5="accent5" accent6="accent6" hlink="hlink" folHlink="folHlink"/>
   <p:sldLayoutIdLst>
-    <p:sldLayoutId id="2147483649" r:id="rId1"/>
-    <p:sldLayoutId id="2147483650" r:id="rId2"/>
-    <p:sldLayoutId id="2147483651" r:id="rId3"/>
-    <p:sldLayoutId id="2147483652" r:id="rId4"/>
-    <p:sldLayoutId id="2147483653" r:id="rId5"/>
-    <p:sldLayoutId id="2147483654" r:id="rId6"/>
-    <p:sldLayoutId id="2147483655" r:id="rId7"/>
-    <p:sldLayoutId id="2147483656" r:id="rId8"/>
-    <p:sldLayoutId id="2147483657" r:id="rId9"/>
-    <p:sldLayoutId id="2147483658" r:id="rId10"/>
-    <p:sldLayoutId id="2147483659" r:id="rId11"/>
+    <p:sldLayoutId id="2147483661" r:id="rId1"/>
+    <p:sldLayoutId id="2147483662" r:id="rId2"/>
+    <p:sldLayoutId id="2147483663" r:id="rId3"/>
+    <p:sldLayoutId id="2147483664" r:id="rId4"/>
+    <p:sldLayoutId id="2147483665" r:id="rId5"/>
+    <p:sldLayoutId id="2147483666" r:id="rId6"/>
+    <p:sldLayoutId id="2147483667" r:id="rId7"/>
+    <p:sldLayoutId id="2147483668" r:id="rId8"/>
+    <p:sldLayoutId id="2147483669" r:id="rId9"/>
+    <p:sldLayoutId id="2147483670" r:id="rId10"/>
+    <p:sldLayoutId id="2147483671" r:id="rId11"/>
   </p:sldLayoutIdLst>
   <p:txStyles>
     <p:titleStyle>
@@ -3319,7 +2972,7 @@
     <p:bg>
       <p:bgPr>
         <a:solidFill>
-          <a:schemeClr val="bg1"/>
+          <a:schemeClr val="tx1"/>
         </a:solidFill>
         <a:effectLst/>
       </p:bgPr>
@@ -3329,7 +2982,7 @@
         <p:cNvPr id="1" name="">
           <a:extLst>
             <a:ext uri="{FF2B5EF4-FFF2-40B4-BE49-F238E27FC236}">
-              <a16:creationId xmlns:a16="http://schemas.microsoft.com/office/drawing/2014/main" id="{A2E07FF3-ED51-42B0-B272-1B4F50EFCF96}"/>
+              <a16:creationId xmlns:a16="http://schemas.microsoft.com/office/drawing/2014/main" id="{07DBCCAA-AEC2-E7D5-6DA0-2B454C311096}"/>
             </a:ext>
           </a:extLst>
         </p:cNvPr>
@@ -3344,394 +2997,360 @@
           <a:chExt cx="0" cy="0"/>
         </a:xfrm>
       </p:grpSpPr>
-      <p:sp useBgFill="1">
-        <p:nvSpPr>
-          <p:cNvPr id="39" name="Rectangle 38">
+      <p:sp>
+        <p:nvSpPr>
+          <p:cNvPr id="3" name="Subtitle 2">
             <a:extLst>
               <a:ext uri="{FF2B5EF4-FFF2-40B4-BE49-F238E27FC236}">
-                <a16:creationId xmlns:a16="http://schemas.microsoft.com/office/drawing/2014/main" id="{E91DC736-0EF8-4F87-9146-EBF1D2EE4D3D}"/>
-              </a:ext>
-              <a:ext uri="{C183D7F6-B498-43B3-948B-1728B52AA6E4}">
-                <adec:decorative xmlns:adec="http://schemas.microsoft.com/office/drawing/2017/decorative" val="1"/>
+                <a16:creationId xmlns:a16="http://schemas.microsoft.com/office/drawing/2014/main" id="{1373690B-6ECA-2D8D-2D0C-253BF276AC07}"/>
               </a:ext>
             </a:extLst>
           </p:cNvPr>
           <p:cNvSpPr>
-            <a:spLocks noGrp="1" noRot="1" noChangeAspect="1" noMove="1" noResize="1" noEditPoints="1" noAdjustHandles="1" noChangeArrowheads="1" noChangeShapeType="1" noTextEdit="1"/>
-          </p:cNvSpPr>
-          <p:nvPr>
-            <p:extLst>
-              <p:ext uri="{386F3935-93C4-4BCD-93E2-E3B085C9AB24}">
-                <p16:designElem xmlns:p16="http://schemas.microsoft.com/office/powerpoint/2015/main" val="1"/>
-              </p:ext>
-            </p:extLst>
+            <a:spLocks noGrp="1"/>
+          </p:cNvSpPr>
+          <p:nvPr>
+            <p:ph type="subTitle" idx="1"/>
           </p:nvPr>
         </p:nvSpPr>
         <p:spPr>
           <a:xfrm>
-            <a:off x="0" y="0"/>
-            <a:ext cx="12192000" cy="6858000"/>
+            <a:off x="163772" y="204717"/>
+            <a:ext cx="8748215" cy="6346208"/>
+          </a:xfrm>
+        </p:spPr>
+        <p:txBody>
+          <a:bodyPr>
+            <a:noAutofit/>
+          </a:bodyPr>
+          <a:lstStyle/>
+          <a:p>
+            <a:endParaRPr lang="en-US" sz="2400" dirty="0">
+              <a:solidFill>
+                <a:schemeClr val="bg1"/>
+              </a:solidFill>
+              <a:latin typeface="Avenir Medium" panose="02000503020000020003" pitchFamily="2" charset="0"/>
+              <a:ea typeface="Bodoni Ornaments" pitchFamily="2" charset="0"/>
+            </a:endParaRPr>
+          </a:p>
+          <a:p>
+            <a:pPr algn="l"/>
+            <a:r>
+              <a:rPr lang="en-US" sz="8800" dirty="0">
+                <a:solidFill>
+                  <a:schemeClr val="bg1"/>
+                </a:solidFill>
+                <a:latin typeface="Avenir Medium" panose="02000503020000020003" pitchFamily="2" charset="0"/>
+                <a:ea typeface="Bodoni Ornaments" pitchFamily="2" charset="0"/>
+              </a:rPr>
+              <a:t>Praise to the Lord the Almighty</a:t>
+            </a:r>
+          </a:p>
+        </p:txBody>
+      </p:sp>
+    </p:spTree>
+    <p:extLst>
+      <p:ext uri="{BB962C8B-B14F-4D97-AF65-F5344CB8AC3E}">
+        <p14:creationId xmlns:p14="http://schemas.microsoft.com/office/powerpoint/2010/main" val="2147333535"/>
+      </p:ext>
+    </p:extLst>
+  </p:cSld>
+  <p:clrMapOvr>
+    <a:masterClrMapping/>
+  </p:clrMapOvr>
+</p:sld>
+</file>
+
+<file path=ppt/slides/slide10.xml><?xml version="1.0" encoding="utf-8"?>
+<p:sld xmlns:a="http://schemas.openxmlformats.org/drawingml/2006/main" xmlns:r="http://schemas.openxmlformats.org/officeDocument/2006/relationships" xmlns:p="http://schemas.openxmlformats.org/presentationml/2006/main">
+  <p:cSld>
+    <p:bg>
+      <p:bgPr>
+        <a:solidFill>
+          <a:schemeClr val="tx1"/>
+        </a:solidFill>
+        <a:effectLst/>
+      </p:bgPr>
+    </p:bg>
+    <p:spTree>
+      <p:nvGrpSpPr>
+        <p:cNvPr id="1" name="">
+          <a:extLst>
+            <a:ext uri="{FF2B5EF4-FFF2-40B4-BE49-F238E27FC236}">
+              <a16:creationId xmlns:a16="http://schemas.microsoft.com/office/drawing/2014/main" id="{3F3A049D-3D6B-D904-5230-C48A554E0EDD}"/>
+            </a:ext>
+          </a:extLst>
+        </p:cNvPr>
+        <p:cNvGrpSpPr/>
+        <p:nvPr/>
+      </p:nvGrpSpPr>
+      <p:grpSpPr>
+        <a:xfrm>
+          <a:off x="0" y="0"/>
+          <a:ext cx="0" cy="0"/>
+          <a:chOff x="0" y="0"/>
+          <a:chExt cx="0" cy="0"/>
+        </a:xfrm>
+      </p:grpSpPr>
+      <p:sp>
+        <p:nvSpPr>
+          <p:cNvPr id="3" name="Subtitle 2">
+            <a:extLst>
+              <a:ext uri="{FF2B5EF4-FFF2-40B4-BE49-F238E27FC236}">
+                <a16:creationId xmlns:a16="http://schemas.microsoft.com/office/drawing/2014/main" id="{0A70C992-A52B-FC06-AE51-642B59447E94}"/>
+              </a:ext>
+            </a:extLst>
+          </p:cNvPr>
+          <p:cNvSpPr>
+            <a:spLocks noGrp="1"/>
+          </p:cNvSpPr>
+          <p:nvPr>
+            <p:ph type="subTitle" idx="1"/>
+          </p:nvPr>
+        </p:nvSpPr>
+        <p:spPr>
+          <a:xfrm>
+            <a:off x="245660" y="191069"/>
+            <a:ext cx="8652680" cy="6469038"/>
+          </a:xfrm>
+        </p:spPr>
+        <p:txBody>
+          <a:bodyPr>
+            <a:noAutofit/>
+          </a:bodyPr>
+          <a:lstStyle/>
+          <a:p>
+            <a:endParaRPr lang="en-US" sz="4400" dirty="0">
+              <a:solidFill>
+                <a:schemeClr val="bg1"/>
+              </a:solidFill>
+              <a:latin typeface="Avenir Medium" panose="02000503020000020003" pitchFamily="2" charset="0"/>
+              <a:ea typeface="Bodoni Ornaments" pitchFamily="2" charset="0"/>
+            </a:endParaRPr>
+          </a:p>
+          <a:p>
+            <a:r>
+              <a:rPr lang="en-US" sz="4400" dirty="0">
+                <a:solidFill>
+                  <a:schemeClr val="bg1"/>
+                </a:solidFill>
+                <a:latin typeface="Avenir Medium" panose="02000503020000020003" pitchFamily="2" charset="0"/>
+                <a:ea typeface="Bodoni Ornaments" pitchFamily="2" charset="0"/>
+              </a:rPr>
+              <a:t>Praise to the Lord, </a:t>
+            </a:r>
+          </a:p>
+          <a:p>
+            <a:r>
+              <a:rPr lang="en-US" sz="4400" dirty="0">
+                <a:solidFill>
+                  <a:schemeClr val="bg1"/>
+                </a:solidFill>
+                <a:latin typeface="Avenir Medium" panose="02000503020000020003" pitchFamily="2" charset="0"/>
+                <a:ea typeface="Bodoni Ornaments" pitchFamily="2" charset="0"/>
+              </a:rPr>
+              <a:t>the Almighty, </a:t>
+            </a:r>
+          </a:p>
+          <a:p>
+            <a:r>
+              <a:rPr lang="en-US" sz="4400" dirty="0">
+                <a:solidFill>
+                  <a:schemeClr val="bg1"/>
+                </a:solidFill>
+                <a:latin typeface="Avenir Medium" panose="02000503020000020003" pitchFamily="2" charset="0"/>
+                <a:ea typeface="Bodoni Ornaments" pitchFamily="2" charset="0"/>
+              </a:rPr>
+              <a:t>the King of creation</a:t>
+            </a:r>
+          </a:p>
+          <a:p>
+            <a:r>
+              <a:rPr lang="en-US" sz="4400" dirty="0">
+                <a:solidFill>
+                  <a:schemeClr val="bg1"/>
+                </a:solidFill>
+                <a:latin typeface="Avenir Medium" panose="02000503020000020003" pitchFamily="2" charset="0"/>
+                <a:ea typeface="Bodoni Ornaments" pitchFamily="2" charset="0"/>
+              </a:rPr>
+              <a:t>O my soul, praise Him, </a:t>
+            </a:r>
+          </a:p>
+          <a:p>
+            <a:r>
+              <a:rPr lang="en-US" sz="4400" dirty="0">
+                <a:solidFill>
+                  <a:schemeClr val="bg1"/>
+                </a:solidFill>
+                <a:latin typeface="Avenir Medium" panose="02000503020000020003" pitchFamily="2" charset="0"/>
+                <a:ea typeface="Bodoni Ornaments" pitchFamily="2" charset="0"/>
+              </a:rPr>
+              <a:t>for He is thy </a:t>
+            </a:r>
+          </a:p>
+          <a:p>
+            <a:r>
+              <a:rPr lang="en-US" sz="4400" dirty="0">
+                <a:solidFill>
+                  <a:schemeClr val="bg1"/>
+                </a:solidFill>
+                <a:latin typeface="Avenir Medium" panose="02000503020000020003" pitchFamily="2" charset="0"/>
+                <a:ea typeface="Bodoni Ornaments" pitchFamily="2" charset="0"/>
+              </a:rPr>
+              <a:t>health and salvation</a:t>
+            </a:r>
+          </a:p>
+        </p:txBody>
+      </p:sp>
+    </p:spTree>
+    <p:extLst>
+      <p:ext uri="{BB962C8B-B14F-4D97-AF65-F5344CB8AC3E}">
+        <p14:creationId xmlns:p14="http://schemas.microsoft.com/office/powerpoint/2010/main" val="3469407949"/>
+      </p:ext>
+    </p:extLst>
+  </p:cSld>
+  <p:clrMapOvr>
+    <a:masterClrMapping/>
+  </p:clrMapOvr>
+</p:sld>
+</file>
+
+<file path=ppt/slides/slide11.xml><?xml version="1.0" encoding="utf-8"?>
+<p:sld xmlns:a="http://schemas.openxmlformats.org/drawingml/2006/main" xmlns:r="http://schemas.openxmlformats.org/officeDocument/2006/relationships" xmlns:p="http://schemas.openxmlformats.org/presentationml/2006/main">
+  <p:cSld>
+    <p:bg>
+      <p:bgPr>
+        <a:solidFill>
+          <a:schemeClr val="tx1"/>
+        </a:solidFill>
+        <a:effectLst/>
+      </p:bgPr>
+    </p:bg>
+    <p:spTree>
+      <p:nvGrpSpPr>
+        <p:cNvPr id="1" name="">
+          <a:extLst>
+            <a:ext uri="{FF2B5EF4-FFF2-40B4-BE49-F238E27FC236}">
+              <a16:creationId xmlns:a16="http://schemas.microsoft.com/office/drawing/2014/main" id="{0A6FCBDF-ABC2-BBDB-8FDD-9040A640FCB7}"/>
+            </a:ext>
+          </a:extLst>
+        </p:cNvPr>
+        <p:cNvGrpSpPr/>
+        <p:nvPr/>
+      </p:nvGrpSpPr>
+      <p:grpSpPr>
+        <a:xfrm>
+          <a:off x="0" y="0"/>
+          <a:ext cx="0" cy="0"/>
+          <a:chOff x="0" y="0"/>
+          <a:chExt cx="0" cy="0"/>
+        </a:xfrm>
+      </p:grpSpPr>
+      <p:sp>
+        <p:nvSpPr>
+          <p:cNvPr id="3" name="Subtitle 2">
+            <a:extLst>
+              <a:ext uri="{FF2B5EF4-FFF2-40B4-BE49-F238E27FC236}">
+                <a16:creationId xmlns:a16="http://schemas.microsoft.com/office/drawing/2014/main" id="{FDA3E2B6-F904-406F-5218-392FDECB19AC}"/>
+              </a:ext>
+            </a:extLst>
+          </p:cNvPr>
+          <p:cNvSpPr>
+            <a:spLocks noGrp="1"/>
+          </p:cNvSpPr>
+          <p:nvPr>
+            <p:ph type="subTitle" idx="1"/>
+          </p:nvPr>
+        </p:nvSpPr>
+        <p:spPr>
+          <a:xfrm>
+            <a:off x="245660" y="191069"/>
+            <a:ext cx="8652680" cy="6469038"/>
+          </a:xfrm>
+        </p:spPr>
+        <p:txBody>
+          <a:bodyPr>
+            <a:noAutofit/>
+          </a:bodyPr>
+          <a:lstStyle/>
+          <a:p>
+            <a:endParaRPr lang="en-US" sz="4400" dirty="0">
+              <a:solidFill>
+                <a:schemeClr val="bg1"/>
+              </a:solidFill>
+              <a:latin typeface="Avenir Medium" panose="02000503020000020003" pitchFamily="2" charset="0"/>
+              <a:ea typeface="Bodoni Ornaments" pitchFamily="2" charset="0"/>
+            </a:endParaRPr>
+          </a:p>
+          <a:p>
+            <a:r>
+              <a:rPr lang="en-US" sz="4400" dirty="0">
+                <a:solidFill>
+                  <a:schemeClr val="bg1"/>
+                </a:solidFill>
+                <a:latin typeface="Avenir Medium" panose="02000503020000020003" pitchFamily="2" charset="0"/>
+                <a:ea typeface="Bodoni Ornaments" pitchFamily="2" charset="0"/>
+              </a:rPr>
+              <a:t>All ye who hear, now to His temple draw near</a:t>
+            </a:r>
+          </a:p>
+          <a:p>
+            <a:r>
+              <a:rPr lang="en-US" sz="4400" dirty="0">
+                <a:solidFill>
+                  <a:schemeClr val="bg1"/>
+                </a:solidFill>
+                <a:latin typeface="Avenir Medium" panose="02000503020000020003" pitchFamily="2" charset="0"/>
+                <a:ea typeface="Bodoni Ornaments" pitchFamily="2" charset="0"/>
+              </a:rPr>
+              <a:t>Praise Him in glad adoration</a:t>
+            </a:r>
+          </a:p>
+        </p:txBody>
+      </p:sp>
+      <p:sp>
+        <p:nvSpPr>
+          <p:cNvPr id="2" name="TextBox 1">
+            <a:extLst>
+              <a:ext uri="{FF2B5EF4-FFF2-40B4-BE49-F238E27FC236}">
+                <a16:creationId xmlns:a16="http://schemas.microsoft.com/office/drawing/2014/main" id="{D82A351F-3465-BA92-8662-58E07FEFB0AE}"/>
+              </a:ext>
+            </a:extLst>
+          </p:cNvPr>
+          <p:cNvSpPr txBox="1"/>
+          <p:nvPr/>
+        </p:nvSpPr>
+        <p:spPr>
+          <a:xfrm>
+            <a:off x="7390614" y="6488668"/>
+            <a:ext cx="1753386" cy="369332"/>
           </a:xfrm>
           <a:prstGeom prst="rect">
             <a:avLst/>
           </a:prstGeom>
-          <a:ln>
-            <a:noFill/>
-          </a:ln>
+          <a:noFill/>
         </p:spPr>
-        <p:style>
-          <a:lnRef idx="2">
-            <a:schemeClr val="accent1">
-              <a:shade val="50000"/>
-            </a:schemeClr>
-          </a:lnRef>
-          <a:fillRef idx="1">
-            <a:schemeClr val="accent1"/>
-          </a:fillRef>
-          <a:effectRef idx="0">
-            <a:schemeClr val="accent1"/>
-          </a:effectRef>
-          <a:fontRef idx="minor">
-            <a:schemeClr val="lt1"/>
-          </a:fontRef>
-        </p:style>
-        <p:txBody>
-          <a:bodyPr rtlCol="0" anchor="ctr"/>
-          <a:lstStyle/>
-          <a:p>
-            <a:pPr algn="ctr"/>
-            <a:endParaRPr lang="en-US"/>
-          </a:p>
-        </p:txBody>
-      </p:sp>
-      <p:pic>
-        <p:nvPicPr>
-          <p:cNvPr id="4" name="Picture 3">
-            <a:extLst>
-              <a:ext uri="{FF2B5EF4-FFF2-40B4-BE49-F238E27FC236}">
-                <a16:creationId xmlns:a16="http://schemas.microsoft.com/office/drawing/2014/main" id="{13B8280D-74D2-D21D-CA1B-5C1389428F63}"/>
-              </a:ext>
-            </a:extLst>
-          </p:cNvPr>
-          <p:cNvPicPr>
-            <a:picLocks noChangeAspect="1"/>
-          </p:cNvPicPr>
-          <p:nvPr/>
-        </p:nvPicPr>
-        <p:blipFill>
-          <a:blip r:embed="rId2"/>
-          <a:srcRect l="4340" r="17526" b="7393"/>
-          <a:stretch>
-            <a:fillRect/>
-          </a:stretch>
-        </p:blipFill>
-        <p:spPr>
-          <a:xfrm>
-            <a:off x="3523488" y="10"/>
-            <a:ext cx="8668512" cy="6857990"/>
-          </a:xfrm>
-          <a:prstGeom prst="rect">
-            <a:avLst/>
-          </a:prstGeom>
-        </p:spPr>
-      </p:pic>
-      <p:sp>
-        <p:nvSpPr>
-          <p:cNvPr id="41" name="Rectangle 40">
-            <a:extLst>
-              <a:ext uri="{FF2B5EF4-FFF2-40B4-BE49-F238E27FC236}">
-                <a16:creationId xmlns:a16="http://schemas.microsoft.com/office/drawing/2014/main" id="{097CD68E-23E3-4007-8847-CD0944C4F7BE}"/>
-              </a:ext>
-              <a:ext uri="{C183D7F6-B498-43B3-948B-1728B52AA6E4}">
-                <adec:decorative xmlns:adec="http://schemas.microsoft.com/office/drawing/2017/decorative" val="1"/>
-              </a:ext>
-            </a:extLst>
-          </p:cNvPr>
-          <p:cNvSpPr>
-            <a:spLocks noGrp="1" noRot="1" noChangeAspect="1" noMove="1" noResize="1" noEditPoints="1" noAdjustHandles="1" noChangeArrowheads="1" noChangeShapeType="1" noTextEdit="1"/>
-          </p:cNvSpPr>
-          <p:nvPr>
-            <p:extLst>
-              <p:ext uri="{386F3935-93C4-4BCD-93E2-E3B085C9AB24}">
-                <p16:designElem xmlns:p16="http://schemas.microsoft.com/office/powerpoint/2015/main" val="1"/>
-              </p:ext>
-            </p:extLst>
-          </p:nvPr>
-        </p:nvSpPr>
-        <p:spPr>
-          <a:xfrm>
-            <a:off x="0" y="0"/>
-            <a:ext cx="9756601" cy="6858000"/>
-          </a:xfrm>
-          <a:prstGeom prst="rect">
-            <a:avLst/>
-          </a:prstGeom>
-          <a:gradFill>
-            <a:gsLst>
-              <a:gs pos="58000">
-                <a:schemeClr val="bg1"/>
-              </a:gs>
-              <a:gs pos="35000">
-                <a:schemeClr val="bg1">
-                  <a:alpha val="79000"/>
-                </a:schemeClr>
-              </a:gs>
-              <a:gs pos="19000">
-                <a:schemeClr val="bg1">
-                  <a:alpha val="38000"/>
-                </a:schemeClr>
-              </a:gs>
-              <a:gs pos="0">
-                <a:schemeClr val="bg1">
-                  <a:alpha val="0"/>
-                </a:schemeClr>
-              </a:gs>
-              <a:gs pos="100000">
-                <a:schemeClr val="bg1"/>
-              </a:gs>
-            </a:gsLst>
-            <a:lin ang="10800000" scaled="0"/>
-          </a:gradFill>
-          <a:ln>
-            <a:noFill/>
-          </a:ln>
-        </p:spPr>
-        <p:style>
-          <a:lnRef idx="2">
-            <a:schemeClr val="accent1">
-              <a:shade val="50000"/>
-            </a:schemeClr>
-          </a:lnRef>
-          <a:fillRef idx="1">
-            <a:schemeClr val="accent1"/>
-          </a:fillRef>
-          <a:effectRef idx="0">
-            <a:schemeClr val="accent1"/>
-          </a:effectRef>
-          <a:fontRef idx="minor">
-            <a:schemeClr val="lt1"/>
-          </a:fontRef>
-        </p:style>
-        <p:txBody>
-          <a:bodyPr rtlCol="0" anchor="ctr"/>
-          <a:lstStyle/>
-          <a:p>
-            <a:pPr algn="ctr"/>
-            <a:endParaRPr lang="en-US" dirty="0"/>
-          </a:p>
-        </p:txBody>
-      </p:sp>
-      <p:sp>
-        <p:nvSpPr>
-          <p:cNvPr id="3" name="Subtitle 2">
-            <a:extLst>
-              <a:ext uri="{FF2B5EF4-FFF2-40B4-BE49-F238E27FC236}">
-                <a16:creationId xmlns:a16="http://schemas.microsoft.com/office/drawing/2014/main" id="{F5453A56-E25A-8265-17BC-0939A7C5C3D4}"/>
-              </a:ext>
-            </a:extLst>
-          </p:cNvPr>
-          <p:cNvSpPr>
-            <a:spLocks noGrp="1"/>
-          </p:cNvSpPr>
-          <p:nvPr>
-            <p:ph type="subTitle" idx="1"/>
-          </p:nvPr>
-        </p:nvSpPr>
-        <p:spPr>
-          <a:xfrm>
-            <a:off x="477980" y="4872922"/>
-            <a:ext cx="4023359" cy="1208141"/>
-          </a:xfrm>
-        </p:spPr>
-        <p:txBody>
-          <a:bodyPr>
-            <a:normAutofit/>
+        <p:txBody>
+          <a:bodyPr wrap="square" rtlCol="0">
+            <a:spAutoFit/>
           </a:bodyPr>
           <a:lstStyle/>
           <a:p>
-            <a:pPr algn="l"/>
-            <a:endParaRPr lang="en-US" sz="2000" dirty="0">
-              <a:latin typeface="Avenir Medium" panose="02000503020000020003" pitchFamily="2" charset="0"/>
-              <a:ea typeface="Bodoni Ornaments" pitchFamily="2" charset="0"/>
-            </a:endParaRPr>
-          </a:p>
-          <a:p>
-            <a:pPr algn="l"/>
-            <a:r>
-              <a:rPr lang="en-US" sz="2000" i="1" dirty="0">
-                <a:latin typeface="Avenir Oblique" panose="02000503020000020003" pitchFamily="2" charset="0"/>
-                <a:ea typeface="Bodoni Ornaments" pitchFamily="2" charset="0"/>
+            <a:r>
+              <a:rPr lang="en-US" dirty="0">
+                <a:solidFill>
+                  <a:schemeClr val="bg1"/>
+                </a:solidFill>
               </a:rPr>
-              <a:t>Praise To The Lord The Almighty</a:t>
-            </a:r>
-          </a:p>
-        </p:txBody>
-      </p:sp>
-      <p:sp>
-        <p:nvSpPr>
-          <p:cNvPr id="43" name="Rectangle 42">
-            <a:extLst>
-              <a:ext uri="{FF2B5EF4-FFF2-40B4-BE49-F238E27FC236}">
-                <a16:creationId xmlns:a16="http://schemas.microsoft.com/office/drawing/2014/main" id="{AF2F604E-43BE-4DC3-B983-E071523364F8}"/>
-              </a:ext>
-              <a:ext uri="{C183D7F6-B498-43B3-948B-1728B52AA6E4}">
-                <adec:decorative xmlns:adec="http://schemas.microsoft.com/office/drawing/2017/decorative" val="1"/>
-              </a:ext>
-            </a:extLst>
-          </p:cNvPr>
-          <p:cNvSpPr>
-            <a:spLocks noGrp="1" noRot="1" noChangeAspect="1" noMove="1" noResize="1" noEditPoints="1" noAdjustHandles="1" noChangeArrowheads="1" noChangeShapeType="1" noTextEdit="1"/>
-          </p:cNvSpPr>
-          <p:nvPr>
-            <p:extLst>
-              <p:ext uri="{386F3935-93C4-4BCD-93E2-E3B085C9AB24}">
-                <p16:designElem xmlns:p16="http://schemas.microsoft.com/office/powerpoint/2015/main" val="1"/>
-              </p:ext>
-            </p:extLst>
-          </p:nvPr>
-        </p:nvSpPr>
-        <p:spPr>
-          <a:xfrm rot="5400000">
-            <a:off x="759921" y="346791"/>
-            <a:ext cx="146304" cy="704088"/>
-          </a:xfrm>
-          <a:prstGeom prst="rect">
-            <a:avLst/>
-          </a:prstGeom>
-          <a:solidFill>
-            <a:schemeClr val="accent2"/>
-          </a:solidFill>
-          <a:ln>
-            <a:noFill/>
-          </a:ln>
-        </p:spPr>
-        <p:style>
-          <a:lnRef idx="2">
-            <a:schemeClr val="accent1">
-              <a:shade val="50000"/>
-            </a:schemeClr>
-          </a:lnRef>
-          <a:fillRef idx="1">
-            <a:schemeClr val="accent1"/>
-          </a:fillRef>
-          <a:effectRef idx="0">
-            <a:schemeClr val="accent1"/>
-          </a:effectRef>
-          <a:fontRef idx="minor">
-            <a:schemeClr val="lt1"/>
-          </a:fontRef>
-        </p:style>
-        <p:txBody>
-          <a:bodyPr rtlCol="0" anchor="ctr"/>
-          <a:lstStyle/>
-          <a:p>
-            <a:pPr algn="ctr"/>
-            <a:endParaRPr lang="en-US">
-              <a:solidFill>
-                <a:prstClr val="white"/>
-              </a:solidFill>
-              <a:latin typeface="Calibri" panose="020F0502020204030204"/>
-            </a:endParaRPr>
-          </a:p>
-        </p:txBody>
-      </p:sp>
-      <p:sp>
-        <p:nvSpPr>
-          <p:cNvPr id="45" name="Rectangle 44">
-            <a:extLst>
-              <a:ext uri="{FF2B5EF4-FFF2-40B4-BE49-F238E27FC236}">
-                <a16:creationId xmlns:a16="http://schemas.microsoft.com/office/drawing/2014/main" id="{08C9B587-E65E-4B52-B37C-ABEBB6E87928}"/>
-              </a:ext>
-              <a:ext uri="{C183D7F6-B498-43B3-948B-1728B52AA6E4}">
-                <adec:decorative xmlns:adec="http://schemas.microsoft.com/office/drawing/2017/decorative" val="1"/>
-              </a:ext>
-            </a:extLst>
-          </p:cNvPr>
-          <p:cNvSpPr>
-            <a:spLocks noGrp="1" noRot="1" noChangeAspect="1" noMove="1" noResize="1" noEditPoints="1" noAdjustHandles="1" noChangeArrowheads="1" noChangeShapeType="1" noTextEdit="1"/>
-          </p:cNvSpPr>
-          <p:nvPr>
-            <p:extLst>
-              <p:ext uri="{386F3935-93C4-4BCD-93E2-E3B085C9AB24}">
-                <p16:designElem xmlns:p16="http://schemas.microsoft.com/office/powerpoint/2015/main" val="1"/>
-              </p:ext>
-            </p:extLst>
-          </p:nvPr>
-        </p:nvSpPr>
-        <p:spPr>
-          <a:xfrm>
-            <a:off x="481029" y="4546920"/>
-            <a:ext cx="3977640" cy="18288"/>
-          </a:xfrm>
-          <a:prstGeom prst="rect">
-            <a:avLst/>
-          </a:prstGeom>
-          <a:solidFill>
-            <a:srgbClr val="D5D5D5"/>
-          </a:solidFill>
-          <a:ln w="3175">
-            <a:noFill/>
-          </a:ln>
-          <a:effectLst/>
-        </p:spPr>
-        <p:style>
-          <a:lnRef idx="2">
-            <a:schemeClr val="accent1">
-              <a:shade val="50000"/>
-            </a:schemeClr>
-          </a:lnRef>
-          <a:fillRef idx="1">
-            <a:schemeClr val="accent1"/>
-          </a:fillRef>
-          <a:effectRef idx="0">
-            <a:schemeClr val="accent1"/>
-          </a:effectRef>
-          <a:fontRef idx="minor">
-            <a:schemeClr val="lt1"/>
-          </a:fontRef>
-        </p:style>
-        <p:txBody>
-          <a:bodyPr rtlCol="0" anchor="ctr"/>
-          <a:lstStyle/>
-          <a:p>
-            <a:pPr marL="0" marR="0" lvl="0" indent="0" algn="ctr" defTabSz="914400" rtl="0" eaLnBrk="1" fontAlgn="auto" latinLnBrk="0" hangingPunct="1">
-              <a:lnSpc>
-                <a:spcPct val="100000"/>
-              </a:lnSpc>
-              <a:spcBef>
-                <a:spcPts val="0"/>
-              </a:spcBef>
-              <a:spcAft>
-                <a:spcPts val="0"/>
-              </a:spcAft>
-              <a:buClrTx/>
-              <a:buSzTx/>
-              <a:buFontTx/>
-              <a:buNone/>
-              <a:tabLst/>
-              <a:defRPr/>
-            </a:pPr>
-            <a:endParaRPr kumimoji="0" lang="en-US" sz="1800" b="0" i="0" u="none" strike="noStrike" kern="1200" cap="none" spc="0" normalizeH="0" baseline="0" noProof="0">
-              <a:ln>
-                <a:noFill/>
-              </a:ln>
-              <a:solidFill>
-                <a:prstClr val="white"/>
-              </a:solidFill>
-              <a:effectLst/>
-              <a:uLnTx/>
-              <a:uFillTx/>
-              <a:latin typeface="Calibri" panose="020F0502020204030204"/>
-              <a:ea typeface="+mn-ea"/>
-              <a:cs typeface="+mn-cs"/>
-            </a:endParaRPr>
+              <a:t>CCLI#7102397</a:t>
+            </a:r>
           </a:p>
         </p:txBody>
       </p:sp>
     </p:spTree>
     <p:extLst>
       <p:ext uri="{BB962C8B-B14F-4D97-AF65-F5344CB8AC3E}">
-        <p14:creationId xmlns:p14="http://schemas.microsoft.com/office/powerpoint/2010/main" val="1126636232"/>
+        <p14:creationId xmlns:p14="http://schemas.microsoft.com/office/powerpoint/2010/main" val="2668540090"/>
       </p:ext>
     </p:extLst>
   </p:cSld>
@@ -3790,8 +3409,8 @@
         </p:nvSpPr>
         <p:spPr>
           <a:xfrm>
-            <a:off x="682831" y="497702"/>
-            <a:ext cx="10826338" cy="5862596"/>
+            <a:off x="245660" y="191069"/>
+            <a:ext cx="8652680" cy="6469038"/>
           </a:xfrm>
         </p:spPr>
         <p:txBody>
@@ -3800,7 +3419,7 @@
           </a:bodyPr>
           <a:lstStyle/>
           <a:p>
-            <a:endParaRPr lang="en-US" sz="3200" dirty="0">
+            <a:endParaRPr lang="en-US" sz="4400" dirty="0">
               <a:solidFill>
                 <a:schemeClr val="bg1"/>
               </a:solidFill>
@@ -3809,60 +3428,75 @@
             </a:endParaRPr>
           </a:p>
           <a:p>
-            <a:endParaRPr lang="en-US" sz="3200" dirty="0">
-              <a:solidFill>
-                <a:schemeClr val="bg1"/>
-              </a:solidFill>
-              <a:latin typeface="Avenir Medium" panose="02000503020000020003" pitchFamily="2" charset="0"/>
-              <a:ea typeface="Bodoni Ornaments" pitchFamily="2" charset="0"/>
-            </a:endParaRPr>
-          </a:p>
-          <a:p>
-            <a:r>
-              <a:rPr lang="en-US" sz="3200" dirty="0">
+            <a:r>
+              <a:rPr lang="en-US" sz="4400" dirty="0">
                 <a:solidFill>
                   <a:schemeClr val="bg1"/>
                 </a:solidFill>
                 <a:latin typeface="Avenir Medium" panose="02000503020000020003" pitchFamily="2" charset="0"/>
                 <a:ea typeface="Bodoni Ornaments" pitchFamily="2" charset="0"/>
               </a:rPr>
-              <a:t>Praise to the Lord, the Almighty, the King of creation</a:t>
-            </a:r>
-          </a:p>
-          <a:p>
-            <a:r>
-              <a:rPr lang="en-US" sz="3200" dirty="0">
+              <a:t>Praise to the Lord, </a:t>
+            </a:r>
+          </a:p>
+          <a:p>
+            <a:r>
+              <a:rPr lang="en-US" sz="4400" dirty="0">
                 <a:solidFill>
                   <a:schemeClr val="bg1"/>
                 </a:solidFill>
                 <a:latin typeface="Avenir Medium" panose="02000503020000020003" pitchFamily="2" charset="0"/>
                 <a:ea typeface="Bodoni Ornaments" pitchFamily="2" charset="0"/>
               </a:rPr>
-              <a:t>O my soul, praise Him, for He is thy health and salvation</a:t>
-            </a:r>
-          </a:p>
-          <a:p>
-            <a:r>
-              <a:rPr lang="en-US" sz="3200" dirty="0">
+              <a:t>the Almighty, </a:t>
+            </a:r>
+          </a:p>
+          <a:p>
+            <a:r>
+              <a:rPr lang="en-US" sz="4400" dirty="0">
                 <a:solidFill>
                   <a:schemeClr val="bg1"/>
                 </a:solidFill>
                 <a:latin typeface="Avenir Medium" panose="02000503020000020003" pitchFamily="2" charset="0"/>
                 <a:ea typeface="Bodoni Ornaments" pitchFamily="2" charset="0"/>
               </a:rPr>
-              <a:t>All ye who hear, now to His temple draw near</a:t>
-            </a:r>
-          </a:p>
-          <a:p>
-            <a:r>
-              <a:rPr lang="en-US" sz="3200" dirty="0">
+              <a:t>the King of creation</a:t>
+            </a:r>
+          </a:p>
+          <a:p>
+            <a:r>
+              <a:rPr lang="en-US" sz="4400" dirty="0">
                 <a:solidFill>
                   <a:schemeClr val="bg1"/>
                 </a:solidFill>
                 <a:latin typeface="Avenir Medium" panose="02000503020000020003" pitchFamily="2" charset="0"/>
                 <a:ea typeface="Bodoni Ornaments" pitchFamily="2" charset="0"/>
               </a:rPr>
-              <a:t>Praise Him in glad adoration</a:t>
+              <a:t>O my soul, praise Him, </a:t>
+            </a:r>
+          </a:p>
+          <a:p>
+            <a:r>
+              <a:rPr lang="en-US" sz="4400" dirty="0">
+                <a:solidFill>
+                  <a:schemeClr val="bg1"/>
+                </a:solidFill>
+                <a:latin typeface="Avenir Medium" panose="02000503020000020003" pitchFamily="2" charset="0"/>
+                <a:ea typeface="Bodoni Ornaments" pitchFamily="2" charset="0"/>
+              </a:rPr>
+              <a:t>for He is thy </a:t>
+            </a:r>
+          </a:p>
+          <a:p>
+            <a:r>
+              <a:rPr lang="en-US" sz="4400" dirty="0">
+                <a:solidFill>
+                  <a:schemeClr val="bg1"/>
+                </a:solidFill>
+                <a:latin typeface="Avenir Medium" panose="02000503020000020003" pitchFamily="2" charset="0"/>
+                <a:ea typeface="Bodoni Ornaments" pitchFamily="2" charset="0"/>
+              </a:rPr>
+              <a:t>health and salvation</a:t>
             </a:r>
           </a:p>
         </p:txBody>
@@ -3881,6 +3515,112 @@
 </file>
 
 <file path=ppt/slides/slide3.xml><?xml version="1.0" encoding="utf-8"?>
+<p:sld xmlns:a="http://schemas.openxmlformats.org/drawingml/2006/main" xmlns:r="http://schemas.openxmlformats.org/officeDocument/2006/relationships" xmlns:p="http://schemas.openxmlformats.org/presentationml/2006/main">
+  <p:cSld>
+    <p:bg>
+      <p:bgPr>
+        <a:solidFill>
+          <a:schemeClr val="tx1"/>
+        </a:solidFill>
+        <a:effectLst/>
+      </p:bgPr>
+    </p:bg>
+    <p:spTree>
+      <p:nvGrpSpPr>
+        <p:cNvPr id="1" name="">
+          <a:extLst>
+            <a:ext uri="{FF2B5EF4-FFF2-40B4-BE49-F238E27FC236}">
+              <a16:creationId xmlns:a16="http://schemas.microsoft.com/office/drawing/2014/main" id="{4C3E5F54-082E-B264-7016-FD8776F626A9}"/>
+            </a:ext>
+          </a:extLst>
+        </p:cNvPr>
+        <p:cNvGrpSpPr/>
+        <p:nvPr/>
+      </p:nvGrpSpPr>
+      <p:grpSpPr>
+        <a:xfrm>
+          <a:off x="0" y="0"/>
+          <a:ext cx="0" cy="0"/>
+          <a:chOff x="0" y="0"/>
+          <a:chExt cx="0" cy="0"/>
+        </a:xfrm>
+      </p:grpSpPr>
+      <p:sp>
+        <p:nvSpPr>
+          <p:cNvPr id="3" name="Subtitle 2">
+            <a:extLst>
+              <a:ext uri="{FF2B5EF4-FFF2-40B4-BE49-F238E27FC236}">
+                <a16:creationId xmlns:a16="http://schemas.microsoft.com/office/drawing/2014/main" id="{A75272F5-FDBA-31BC-129B-A81D97B5DE36}"/>
+              </a:ext>
+            </a:extLst>
+          </p:cNvPr>
+          <p:cNvSpPr>
+            <a:spLocks noGrp="1"/>
+          </p:cNvSpPr>
+          <p:nvPr>
+            <p:ph type="subTitle" idx="1"/>
+          </p:nvPr>
+        </p:nvSpPr>
+        <p:spPr>
+          <a:xfrm>
+            <a:off x="245660" y="191069"/>
+            <a:ext cx="8652680" cy="6469038"/>
+          </a:xfrm>
+        </p:spPr>
+        <p:txBody>
+          <a:bodyPr>
+            <a:noAutofit/>
+          </a:bodyPr>
+          <a:lstStyle/>
+          <a:p>
+            <a:endParaRPr lang="en-US" sz="4400" dirty="0">
+              <a:solidFill>
+                <a:schemeClr val="bg1"/>
+              </a:solidFill>
+              <a:latin typeface="Avenir Medium" panose="02000503020000020003" pitchFamily="2" charset="0"/>
+              <a:ea typeface="Bodoni Ornaments" pitchFamily="2" charset="0"/>
+            </a:endParaRPr>
+          </a:p>
+          <a:p>
+            <a:r>
+              <a:rPr lang="en-US" sz="4400" dirty="0">
+                <a:solidFill>
+                  <a:schemeClr val="bg1"/>
+                </a:solidFill>
+                <a:latin typeface="Avenir Medium" panose="02000503020000020003" pitchFamily="2" charset="0"/>
+                <a:ea typeface="Bodoni Ornaments" pitchFamily="2" charset="0"/>
+              </a:rPr>
+              <a:t>All ye who hear, now to His temple draw near</a:t>
+            </a:r>
+          </a:p>
+          <a:p>
+            <a:r>
+              <a:rPr lang="en-US" sz="4400" dirty="0">
+                <a:solidFill>
+                  <a:schemeClr val="bg1"/>
+                </a:solidFill>
+                <a:latin typeface="Avenir Medium" panose="02000503020000020003" pitchFamily="2" charset="0"/>
+                <a:ea typeface="Bodoni Ornaments" pitchFamily="2" charset="0"/>
+              </a:rPr>
+              <a:t>Praise Him in glad adoration</a:t>
+            </a:r>
+          </a:p>
+        </p:txBody>
+      </p:sp>
+    </p:spTree>
+    <p:extLst>
+      <p:ext uri="{BB962C8B-B14F-4D97-AF65-F5344CB8AC3E}">
+        <p14:creationId xmlns:p14="http://schemas.microsoft.com/office/powerpoint/2010/main" val="3692422851"/>
+      </p:ext>
+    </p:extLst>
+  </p:cSld>
+  <p:clrMapOvr>
+    <a:masterClrMapping/>
+  </p:clrMapOvr>
+</p:sld>
+</file>
+
+<file path=ppt/slides/slide4.xml><?xml version="1.0" encoding="utf-8"?>
 <p:sld xmlns:a="http://schemas.openxmlformats.org/drawingml/2006/main" xmlns:r="http://schemas.openxmlformats.org/officeDocument/2006/relationships" xmlns:p="http://schemas.openxmlformats.org/presentationml/2006/main">
   <p:cSld>
     <p:bg>
@@ -3929,8 +3669,8 @@
         </p:nvSpPr>
         <p:spPr>
           <a:xfrm>
-            <a:off x="682831" y="497702"/>
-            <a:ext cx="10826338" cy="5862596"/>
+            <a:off x="286603" y="163773"/>
+            <a:ext cx="8584442" cy="6455391"/>
           </a:xfrm>
         </p:spPr>
         <p:txBody>
@@ -3939,7 +3679,7 @@
           </a:bodyPr>
           <a:lstStyle/>
           <a:p>
-            <a:endParaRPr lang="en-US" sz="3200" dirty="0">
+            <a:endParaRPr lang="en-US" sz="4400" dirty="0">
               <a:solidFill>
                 <a:schemeClr val="bg1"/>
               </a:solidFill>
@@ -3949,7 +3689,7 @@
           </a:p>
           <a:p>
             <a:r>
-              <a:rPr lang="en-US" sz="3200" dirty="0">
+              <a:rPr lang="en-US" sz="4400" dirty="0">
                 <a:solidFill>
                   <a:schemeClr val="bg1"/>
                 </a:solidFill>
@@ -3959,7 +3699,7 @@
               <a:t>Praise to the Lord, Who o’er all things so wondrously </a:t>
             </a:r>
             <a:r>
-              <a:rPr lang="en-US" sz="3200" dirty="0" err="1">
+              <a:rPr lang="en-US" sz="4400" dirty="0" err="1">
                 <a:solidFill>
                   <a:schemeClr val="bg1"/>
                 </a:solidFill>
@@ -3968,7 +3708,7 @@
               </a:rPr>
               <a:t>reigneth</a:t>
             </a:r>
-            <a:endParaRPr lang="en-US" sz="3200" dirty="0">
+            <a:endParaRPr lang="en-US" sz="4400" dirty="0">
               <a:solidFill>
                 <a:schemeClr val="bg1"/>
               </a:solidFill>
@@ -3978,7 +3718,7 @@
           </a:p>
           <a:p>
             <a:r>
-              <a:rPr lang="en-US" sz="3200" dirty="0">
+              <a:rPr lang="en-US" sz="4400" dirty="0">
                 <a:solidFill>
                   <a:schemeClr val="bg1"/>
                 </a:solidFill>
@@ -3988,7 +3728,7 @@
               <a:t>Shelters thee under His wings, yea, so gently </a:t>
             </a:r>
             <a:r>
-              <a:rPr lang="en-US" sz="3200" dirty="0" err="1">
+              <a:rPr lang="en-US" sz="4400" dirty="0" err="1">
                 <a:solidFill>
                   <a:schemeClr val="bg1"/>
                 </a:solidFill>
@@ -3997,57 +3737,13 @@
               </a:rPr>
               <a:t>sustaineth</a:t>
             </a:r>
-            <a:endParaRPr lang="en-US" sz="3200" dirty="0">
+            <a:endParaRPr lang="en-US" sz="4400" dirty="0">
               <a:solidFill>
                 <a:schemeClr val="bg1"/>
               </a:solidFill>
               <a:latin typeface="Avenir Medium" panose="02000503020000020003" pitchFamily="2" charset="0"/>
               <a:ea typeface="Bodoni Ornaments" pitchFamily="2" charset="0"/>
             </a:endParaRPr>
-          </a:p>
-          <a:p>
-            <a:r>
-              <a:rPr lang="en-US" sz="3200" dirty="0">
-                <a:solidFill>
-                  <a:schemeClr val="bg1"/>
-                </a:solidFill>
-                <a:latin typeface="Avenir Medium" panose="02000503020000020003" pitchFamily="2" charset="0"/>
-                <a:ea typeface="Bodoni Ornaments" pitchFamily="2" charset="0"/>
-              </a:rPr>
-              <a:t>Hast thou not seen how thy desires have been</a:t>
-            </a:r>
-          </a:p>
-          <a:p>
-            <a:r>
-              <a:rPr lang="en-US" sz="3200" dirty="0">
-                <a:solidFill>
-                  <a:schemeClr val="bg1"/>
-                </a:solidFill>
-                <a:latin typeface="Avenir Medium" panose="02000503020000020003" pitchFamily="2" charset="0"/>
-                <a:ea typeface="Bodoni Ornaments" pitchFamily="2" charset="0"/>
-              </a:rPr>
-              <a:t>Granted in what He </a:t>
-            </a:r>
-            <a:r>
-              <a:rPr lang="en-US" sz="3200" dirty="0" err="1">
-                <a:solidFill>
-                  <a:schemeClr val="bg1"/>
-                </a:solidFill>
-                <a:latin typeface="Avenir Medium" panose="02000503020000020003" pitchFamily="2" charset="0"/>
-                <a:ea typeface="Bodoni Ornaments" pitchFamily="2" charset="0"/>
-              </a:rPr>
-              <a:t>ordaineth</a:t>
-            </a:r>
-            <a:r>
-              <a:rPr lang="en-US" sz="3200" dirty="0">
-                <a:solidFill>
-                  <a:schemeClr val="bg1"/>
-                </a:solidFill>
-                <a:latin typeface="Avenir Medium" panose="02000503020000020003" pitchFamily="2" charset="0"/>
-                <a:ea typeface="Bodoni Ornaments" pitchFamily="2" charset="0"/>
-              </a:rPr>
-              <a:t>?</a:t>
-            </a:r>
           </a:p>
         </p:txBody>
       </p:sp>
@@ -4064,7 +3760,133 @@
 </p:sld>
 </file>
 
-<file path=ppt/slides/slide4.xml><?xml version="1.0" encoding="utf-8"?>
+<file path=ppt/slides/slide5.xml><?xml version="1.0" encoding="utf-8"?>
+<p:sld xmlns:a="http://schemas.openxmlformats.org/drawingml/2006/main" xmlns:r="http://schemas.openxmlformats.org/officeDocument/2006/relationships" xmlns:p="http://schemas.openxmlformats.org/presentationml/2006/main">
+  <p:cSld>
+    <p:bg>
+      <p:bgPr>
+        <a:solidFill>
+          <a:schemeClr val="tx1"/>
+        </a:solidFill>
+        <a:effectLst/>
+      </p:bgPr>
+    </p:bg>
+    <p:spTree>
+      <p:nvGrpSpPr>
+        <p:cNvPr id="1" name="">
+          <a:extLst>
+            <a:ext uri="{FF2B5EF4-FFF2-40B4-BE49-F238E27FC236}">
+              <a16:creationId xmlns:a16="http://schemas.microsoft.com/office/drawing/2014/main" id="{19A2A5A8-D337-CDC3-F7D1-395B7BCC91DD}"/>
+            </a:ext>
+          </a:extLst>
+        </p:cNvPr>
+        <p:cNvGrpSpPr/>
+        <p:nvPr/>
+      </p:nvGrpSpPr>
+      <p:grpSpPr>
+        <a:xfrm>
+          <a:off x="0" y="0"/>
+          <a:ext cx="0" cy="0"/>
+          <a:chOff x="0" y="0"/>
+          <a:chExt cx="0" cy="0"/>
+        </a:xfrm>
+      </p:grpSpPr>
+      <p:sp>
+        <p:nvSpPr>
+          <p:cNvPr id="3" name="Subtitle 2">
+            <a:extLst>
+              <a:ext uri="{FF2B5EF4-FFF2-40B4-BE49-F238E27FC236}">
+                <a16:creationId xmlns:a16="http://schemas.microsoft.com/office/drawing/2014/main" id="{B8C72408-D342-B8C6-C15E-78148E74F205}"/>
+              </a:ext>
+            </a:extLst>
+          </p:cNvPr>
+          <p:cNvSpPr>
+            <a:spLocks noGrp="1"/>
+          </p:cNvSpPr>
+          <p:nvPr>
+            <p:ph type="subTitle" idx="1"/>
+          </p:nvPr>
+        </p:nvSpPr>
+        <p:spPr>
+          <a:xfrm>
+            <a:off x="286603" y="163773"/>
+            <a:ext cx="8584442" cy="6455391"/>
+          </a:xfrm>
+        </p:spPr>
+        <p:txBody>
+          <a:bodyPr>
+            <a:noAutofit/>
+          </a:bodyPr>
+          <a:lstStyle/>
+          <a:p>
+            <a:endParaRPr lang="en-US" sz="4400" dirty="0">
+              <a:solidFill>
+                <a:schemeClr val="bg1"/>
+              </a:solidFill>
+              <a:latin typeface="Avenir Medium" panose="02000503020000020003" pitchFamily="2" charset="0"/>
+              <a:ea typeface="Bodoni Ornaments" pitchFamily="2" charset="0"/>
+            </a:endParaRPr>
+          </a:p>
+          <a:p>
+            <a:r>
+              <a:rPr lang="en-US" sz="4400" dirty="0">
+                <a:solidFill>
+                  <a:schemeClr val="bg1"/>
+                </a:solidFill>
+                <a:latin typeface="Avenir Medium" panose="02000503020000020003" pitchFamily="2" charset="0"/>
+                <a:ea typeface="Bodoni Ornaments" pitchFamily="2" charset="0"/>
+              </a:rPr>
+              <a:t>Hast thou not seen how thy desires have been</a:t>
+            </a:r>
+          </a:p>
+          <a:p>
+            <a:r>
+              <a:rPr lang="en-US" sz="4400" dirty="0">
+                <a:solidFill>
+                  <a:schemeClr val="bg1"/>
+                </a:solidFill>
+                <a:latin typeface="Avenir Medium" panose="02000503020000020003" pitchFamily="2" charset="0"/>
+                <a:ea typeface="Bodoni Ornaments" pitchFamily="2" charset="0"/>
+              </a:rPr>
+              <a:t>Granted in what He </a:t>
+            </a:r>
+            <a:r>
+              <a:rPr lang="en-US" sz="4400" dirty="0" err="1">
+                <a:solidFill>
+                  <a:schemeClr val="bg1"/>
+                </a:solidFill>
+                <a:latin typeface="Avenir Medium" panose="02000503020000020003" pitchFamily="2" charset="0"/>
+                <a:ea typeface="Bodoni Ornaments" pitchFamily="2" charset="0"/>
+              </a:rPr>
+              <a:t>ordaineth</a:t>
+            </a:r>
+            <a:r>
+              <a:rPr lang="en-US" sz="4400" dirty="0">
+                <a:solidFill>
+                  <a:schemeClr val="bg1"/>
+                </a:solidFill>
+                <a:latin typeface="Avenir Medium" panose="02000503020000020003" pitchFamily="2" charset="0"/>
+                <a:ea typeface="Bodoni Ornaments" pitchFamily="2" charset="0"/>
+              </a:rPr>
+              <a:t>?</a:t>
+            </a:r>
+          </a:p>
+        </p:txBody>
+      </p:sp>
+    </p:spTree>
+    <p:extLst>
+      <p:ext uri="{BB962C8B-B14F-4D97-AF65-F5344CB8AC3E}">
+        <p14:creationId xmlns:p14="http://schemas.microsoft.com/office/powerpoint/2010/main" val="2449826107"/>
+      </p:ext>
+    </p:extLst>
+  </p:cSld>
+  <p:clrMapOvr>
+    <a:masterClrMapping/>
+  </p:clrMapOvr>
+</p:sld>
+</file>
+
+<file path=ppt/slides/slide6.xml><?xml version="1.0" encoding="utf-8"?>
 <p:sld xmlns:a="http://schemas.openxmlformats.org/drawingml/2006/main" xmlns:r="http://schemas.openxmlformats.org/officeDocument/2006/relationships" xmlns:p="http://schemas.openxmlformats.org/presentationml/2006/main">
   <p:cSld>
     <p:bg>
@@ -4113,8 +3935,8 @@
         </p:nvSpPr>
         <p:spPr>
           <a:xfrm>
-            <a:off x="682831" y="497702"/>
-            <a:ext cx="10826338" cy="5862596"/>
+            <a:off x="245660" y="232013"/>
+            <a:ext cx="8652680" cy="6469038"/>
           </a:xfrm>
         </p:spPr>
         <p:txBody>
@@ -4123,7 +3945,7 @@
           </a:bodyPr>
           <a:lstStyle/>
           <a:p>
-            <a:endParaRPr lang="en-US" sz="3200" dirty="0">
+            <a:endParaRPr lang="en-US" sz="4400" dirty="0">
               <a:solidFill>
                 <a:schemeClr val="bg1"/>
               </a:solidFill>
@@ -4132,29 +3954,32 @@
             </a:endParaRPr>
           </a:p>
           <a:p>
-            <a:endParaRPr lang="en-US" sz="3200" dirty="0">
-              <a:solidFill>
-                <a:schemeClr val="bg1"/>
-              </a:solidFill>
-              <a:latin typeface="Avenir Medium" panose="02000503020000020003" pitchFamily="2" charset="0"/>
-              <a:ea typeface="Bodoni Ornaments" pitchFamily="2" charset="0"/>
-            </a:endParaRPr>
-          </a:p>
-          <a:p>
-            <a:r>
-              <a:rPr lang="en-US" sz="3200" dirty="0">
+            <a:r>
+              <a:rPr lang="en-US" sz="4400" dirty="0">
                 <a:solidFill>
                   <a:schemeClr val="bg1"/>
                 </a:solidFill>
                 <a:latin typeface="Avenir Medium" panose="02000503020000020003" pitchFamily="2" charset="0"/>
                 <a:ea typeface="Bodoni Ornaments" pitchFamily="2" charset="0"/>
               </a:rPr>
-              <a:t>Praise to the Lord, who doth prosper thy work and defend thee;</a:t>
-            </a:r>
-          </a:p>
-          <a:p>
-            <a:r>
-              <a:rPr lang="en-US" sz="3200" dirty="0">
+              <a:t>Praise to the Lord, who doth prosper thy work </a:t>
+            </a:r>
+          </a:p>
+          <a:p>
+            <a:r>
+              <a:rPr lang="en-US" sz="4400" dirty="0">
+                <a:solidFill>
+                  <a:schemeClr val="bg1"/>
+                </a:solidFill>
+                <a:latin typeface="Avenir Medium" panose="02000503020000020003" pitchFamily="2" charset="0"/>
+                <a:ea typeface="Bodoni Ornaments" pitchFamily="2" charset="0"/>
+              </a:rPr>
+              <a:t>and defend thee;</a:t>
+            </a:r>
+          </a:p>
+          <a:p>
+            <a:r>
+              <a:rPr lang="en-US" sz="4400" dirty="0">
                 <a:solidFill>
                   <a:schemeClr val="bg1"/>
                 </a:solidFill>
@@ -4162,30 +3987,6 @@
                 <a:ea typeface="Bodoni Ornaments" pitchFamily="2" charset="0"/>
               </a:rPr>
               <a:t>Surely His goodness and mercy here daily attend thee;</a:t>
-            </a:r>
-          </a:p>
-          <a:p>
-            <a:r>
-              <a:rPr lang="en-US" sz="3200" dirty="0">
-                <a:solidFill>
-                  <a:schemeClr val="bg1"/>
-                </a:solidFill>
-                <a:latin typeface="Avenir Medium" panose="02000503020000020003" pitchFamily="2" charset="0"/>
-                <a:ea typeface="Bodoni Ornaments" pitchFamily="2" charset="0"/>
-              </a:rPr>
-              <a:t>Ponder anew what the Almighty can do,</a:t>
-            </a:r>
-          </a:p>
-          <a:p>
-            <a:r>
-              <a:rPr lang="en-US" sz="3200" dirty="0">
-                <a:solidFill>
-                  <a:schemeClr val="bg1"/>
-                </a:solidFill>
-                <a:latin typeface="Avenir Medium" panose="02000503020000020003" pitchFamily="2" charset="0"/>
-                <a:ea typeface="Bodoni Ornaments" pitchFamily="2" charset="0"/>
-              </a:rPr>
-              <a:t>If with His love He befriend thee.</a:t>
             </a:r>
           </a:p>
         </p:txBody>
@@ -4203,7 +4004,125 @@
 </p:sld>
 </file>
 
-<file path=ppt/slides/slide5.xml><?xml version="1.0" encoding="utf-8"?>
+<file path=ppt/slides/slide7.xml><?xml version="1.0" encoding="utf-8"?>
+<p:sld xmlns:a="http://schemas.openxmlformats.org/drawingml/2006/main" xmlns:r="http://schemas.openxmlformats.org/officeDocument/2006/relationships" xmlns:p="http://schemas.openxmlformats.org/presentationml/2006/main">
+  <p:cSld>
+    <p:bg>
+      <p:bgPr>
+        <a:solidFill>
+          <a:schemeClr val="tx1"/>
+        </a:solidFill>
+        <a:effectLst/>
+      </p:bgPr>
+    </p:bg>
+    <p:spTree>
+      <p:nvGrpSpPr>
+        <p:cNvPr id="1" name="">
+          <a:extLst>
+            <a:ext uri="{FF2B5EF4-FFF2-40B4-BE49-F238E27FC236}">
+              <a16:creationId xmlns:a16="http://schemas.microsoft.com/office/drawing/2014/main" id="{2FEFCC83-4336-6DA9-BC89-0C6B69F66870}"/>
+            </a:ext>
+          </a:extLst>
+        </p:cNvPr>
+        <p:cNvGrpSpPr/>
+        <p:nvPr/>
+      </p:nvGrpSpPr>
+      <p:grpSpPr>
+        <a:xfrm>
+          <a:off x="0" y="0"/>
+          <a:ext cx="0" cy="0"/>
+          <a:chOff x="0" y="0"/>
+          <a:chExt cx="0" cy="0"/>
+        </a:xfrm>
+      </p:grpSpPr>
+      <p:sp>
+        <p:nvSpPr>
+          <p:cNvPr id="3" name="Subtitle 2">
+            <a:extLst>
+              <a:ext uri="{FF2B5EF4-FFF2-40B4-BE49-F238E27FC236}">
+                <a16:creationId xmlns:a16="http://schemas.microsoft.com/office/drawing/2014/main" id="{70619F17-B369-5308-027C-7D7849A926A5}"/>
+              </a:ext>
+            </a:extLst>
+          </p:cNvPr>
+          <p:cNvSpPr>
+            <a:spLocks noGrp="1"/>
+          </p:cNvSpPr>
+          <p:nvPr>
+            <p:ph type="subTitle" idx="1"/>
+          </p:nvPr>
+        </p:nvSpPr>
+        <p:spPr>
+          <a:xfrm>
+            <a:off x="245660" y="232013"/>
+            <a:ext cx="8652680" cy="6469038"/>
+          </a:xfrm>
+        </p:spPr>
+        <p:txBody>
+          <a:bodyPr>
+            <a:noAutofit/>
+          </a:bodyPr>
+          <a:lstStyle/>
+          <a:p>
+            <a:endParaRPr lang="en-US" sz="4400" dirty="0">
+              <a:solidFill>
+                <a:schemeClr val="bg1"/>
+              </a:solidFill>
+              <a:latin typeface="Avenir Medium" panose="02000503020000020003" pitchFamily="2" charset="0"/>
+              <a:ea typeface="Bodoni Ornaments" pitchFamily="2" charset="0"/>
+            </a:endParaRPr>
+          </a:p>
+          <a:p>
+            <a:r>
+              <a:rPr lang="en-US" sz="4400" dirty="0">
+                <a:solidFill>
+                  <a:schemeClr val="bg1"/>
+                </a:solidFill>
+                <a:latin typeface="Avenir Medium" panose="02000503020000020003" pitchFamily="2" charset="0"/>
+                <a:ea typeface="Bodoni Ornaments" pitchFamily="2" charset="0"/>
+              </a:rPr>
+              <a:t>Ponder anew what </a:t>
+            </a:r>
+          </a:p>
+          <a:p>
+            <a:r>
+              <a:rPr lang="en-US" sz="4400" dirty="0">
+                <a:solidFill>
+                  <a:schemeClr val="bg1"/>
+                </a:solidFill>
+                <a:latin typeface="Avenir Medium" panose="02000503020000020003" pitchFamily="2" charset="0"/>
+                <a:ea typeface="Bodoni Ornaments" pitchFamily="2" charset="0"/>
+              </a:rPr>
+              <a:t>the Almighty can do,</a:t>
+            </a:r>
+          </a:p>
+          <a:p>
+            <a:r>
+              <a:rPr lang="en-US" sz="4400" dirty="0">
+                <a:solidFill>
+                  <a:schemeClr val="bg1"/>
+                </a:solidFill>
+                <a:latin typeface="Avenir Medium" panose="02000503020000020003" pitchFamily="2" charset="0"/>
+                <a:ea typeface="Bodoni Ornaments" pitchFamily="2" charset="0"/>
+              </a:rPr>
+              <a:t>If with His love He befriend thee</a:t>
+            </a:r>
+          </a:p>
+        </p:txBody>
+      </p:sp>
+    </p:spTree>
+    <p:extLst>
+      <p:ext uri="{BB962C8B-B14F-4D97-AF65-F5344CB8AC3E}">
+        <p14:creationId xmlns:p14="http://schemas.microsoft.com/office/powerpoint/2010/main" val="88042691"/>
+      </p:ext>
+    </p:extLst>
+  </p:cSld>
+  <p:clrMapOvr>
+    <a:masterClrMapping/>
+  </p:clrMapOvr>
+</p:sld>
+</file>
+
+<file path=ppt/slides/slide8.xml><?xml version="1.0" encoding="utf-8"?>
 <p:sld xmlns:a="http://schemas.openxmlformats.org/drawingml/2006/main" xmlns:r="http://schemas.openxmlformats.org/officeDocument/2006/relationships" xmlns:p="http://schemas.openxmlformats.org/presentationml/2006/main">
   <p:cSld>
     <p:bg>
@@ -4252,8 +4171,8 @@
         </p:nvSpPr>
         <p:spPr>
           <a:xfrm>
-            <a:off x="682831" y="497702"/>
-            <a:ext cx="10826338" cy="5862596"/>
+            <a:off x="232012" y="218364"/>
+            <a:ext cx="8639033" cy="6387151"/>
           </a:xfrm>
         </p:spPr>
         <p:txBody>
@@ -4262,7 +4181,7 @@
           </a:bodyPr>
           <a:lstStyle/>
           <a:p>
-            <a:endParaRPr lang="en-US" sz="3200" dirty="0">
+            <a:endParaRPr lang="en-US" sz="4400" dirty="0">
               <a:solidFill>
                 <a:schemeClr val="bg1"/>
               </a:solidFill>
@@ -4271,17 +4190,8 @@
             </a:endParaRPr>
           </a:p>
           <a:p>
-            <a:endParaRPr lang="en-US" sz="3200" dirty="0">
-              <a:solidFill>
-                <a:schemeClr val="bg1"/>
-              </a:solidFill>
-              <a:latin typeface="Avenir Medium" panose="02000503020000020003" pitchFamily="2" charset="0"/>
-              <a:ea typeface="Bodoni Ornaments" pitchFamily="2" charset="0"/>
-            </a:endParaRPr>
-          </a:p>
-          <a:p>
-            <a:r>
-              <a:rPr lang="en-US" sz="3200" dirty="0">
+            <a:r>
+              <a:rPr lang="en-US" sz="4400" dirty="0">
                 <a:solidFill>
                   <a:schemeClr val="bg1"/>
                 </a:solidFill>
@@ -4293,38 +4203,26 @@
           </a:p>
           <a:p>
             <a:r>
-              <a:rPr lang="en-US" sz="3200" dirty="0">
+              <a:rPr lang="en-US" sz="4400" dirty="0">
                 <a:solidFill>
                   <a:schemeClr val="bg1"/>
                 </a:solidFill>
                 <a:latin typeface="Avenir Medium" panose="02000503020000020003" pitchFamily="2" charset="0"/>
                 <a:ea typeface="Bodoni Ornaments" pitchFamily="2" charset="0"/>
               </a:rPr>
-              <a:t>All that hath life and breath, come now with praises before Him</a:t>
-            </a:r>
-          </a:p>
-          <a:p>
-            <a:r>
-              <a:rPr lang="en-US" sz="3200" dirty="0">
+              <a:t>All that hath life and breath, come now with praises </a:t>
+            </a:r>
+          </a:p>
+          <a:p>
+            <a:r>
+              <a:rPr lang="en-US" sz="4400" dirty="0">
                 <a:solidFill>
                   <a:schemeClr val="bg1"/>
                 </a:solidFill>
                 <a:latin typeface="Avenir Medium" panose="02000503020000020003" pitchFamily="2" charset="0"/>
                 <a:ea typeface="Bodoni Ornaments" pitchFamily="2" charset="0"/>
               </a:rPr>
-              <a:t>Let the Amen sound from His people again</a:t>
-            </a:r>
-          </a:p>
-          <a:p>
-            <a:r>
-              <a:rPr lang="en-US" sz="3200" dirty="0">
-                <a:solidFill>
-                  <a:schemeClr val="bg1"/>
-                </a:solidFill>
-                <a:latin typeface="Avenir Medium" panose="02000503020000020003" pitchFamily="2" charset="0"/>
-                <a:ea typeface="Bodoni Ornaments" pitchFamily="2" charset="0"/>
-              </a:rPr>
-              <a:t>Gladly for aye we adore Him</a:t>
+              <a:t>before Him</a:t>
             </a:r>
           </a:p>
         </p:txBody>
@@ -4342,10 +4240,125 @@
 </p:sld>
 </file>
 
+<file path=ppt/slides/slide9.xml><?xml version="1.0" encoding="utf-8"?>
+<p:sld xmlns:a="http://schemas.openxmlformats.org/drawingml/2006/main" xmlns:r="http://schemas.openxmlformats.org/officeDocument/2006/relationships" xmlns:p="http://schemas.openxmlformats.org/presentationml/2006/main">
+  <p:cSld>
+    <p:bg>
+      <p:bgPr>
+        <a:solidFill>
+          <a:schemeClr val="tx1"/>
+        </a:solidFill>
+        <a:effectLst/>
+      </p:bgPr>
+    </p:bg>
+    <p:spTree>
+      <p:nvGrpSpPr>
+        <p:cNvPr id="1" name="">
+          <a:extLst>
+            <a:ext uri="{FF2B5EF4-FFF2-40B4-BE49-F238E27FC236}">
+              <a16:creationId xmlns:a16="http://schemas.microsoft.com/office/drawing/2014/main" id="{10317315-1F8C-8B05-4852-5AB1DBB3DB58}"/>
+            </a:ext>
+          </a:extLst>
+        </p:cNvPr>
+        <p:cNvGrpSpPr/>
+        <p:nvPr/>
+      </p:nvGrpSpPr>
+      <p:grpSpPr>
+        <a:xfrm>
+          <a:off x="0" y="0"/>
+          <a:ext cx="0" cy="0"/>
+          <a:chOff x="0" y="0"/>
+          <a:chExt cx="0" cy="0"/>
+        </a:xfrm>
+      </p:grpSpPr>
+      <p:sp>
+        <p:nvSpPr>
+          <p:cNvPr id="3" name="Subtitle 2">
+            <a:extLst>
+              <a:ext uri="{FF2B5EF4-FFF2-40B4-BE49-F238E27FC236}">
+                <a16:creationId xmlns:a16="http://schemas.microsoft.com/office/drawing/2014/main" id="{F1E8AEDF-FE27-BE7E-65FB-3F92118C76C2}"/>
+              </a:ext>
+            </a:extLst>
+          </p:cNvPr>
+          <p:cNvSpPr>
+            <a:spLocks noGrp="1"/>
+          </p:cNvSpPr>
+          <p:nvPr>
+            <p:ph type="subTitle" idx="1"/>
+          </p:nvPr>
+        </p:nvSpPr>
+        <p:spPr>
+          <a:xfrm>
+            <a:off x="232012" y="218364"/>
+            <a:ext cx="8639033" cy="6387151"/>
+          </a:xfrm>
+        </p:spPr>
+        <p:txBody>
+          <a:bodyPr>
+            <a:noAutofit/>
+          </a:bodyPr>
+          <a:lstStyle/>
+          <a:p>
+            <a:endParaRPr lang="en-US" sz="4400" dirty="0">
+              <a:solidFill>
+                <a:schemeClr val="bg1"/>
+              </a:solidFill>
+              <a:latin typeface="Avenir Medium" panose="02000503020000020003" pitchFamily="2" charset="0"/>
+              <a:ea typeface="Bodoni Ornaments" pitchFamily="2" charset="0"/>
+            </a:endParaRPr>
+          </a:p>
+          <a:p>
+            <a:endParaRPr lang="en-US" sz="4400" dirty="0">
+              <a:solidFill>
+                <a:schemeClr val="bg1"/>
+              </a:solidFill>
+              <a:latin typeface="Avenir Medium" panose="02000503020000020003" pitchFamily="2" charset="0"/>
+              <a:ea typeface="Bodoni Ornaments" pitchFamily="2" charset="0"/>
+            </a:endParaRPr>
+          </a:p>
+          <a:p>
+            <a:r>
+              <a:rPr lang="en-US" sz="4400" dirty="0">
+                <a:solidFill>
+                  <a:schemeClr val="bg1"/>
+                </a:solidFill>
+                <a:latin typeface="Avenir Medium" panose="02000503020000020003" pitchFamily="2" charset="0"/>
+                <a:ea typeface="Bodoni Ornaments" pitchFamily="2" charset="0"/>
+              </a:rPr>
+              <a:t>Let the Amen sound from His people again</a:t>
+            </a:r>
+          </a:p>
+          <a:p>
+            <a:r>
+              <a:rPr lang="en-US" sz="4400" dirty="0">
+                <a:solidFill>
+                  <a:schemeClr val="bg1"/>
+                </a:solidFill>
+                <a:latin typeface="Avenir Medium" panose="02000503020000020003" pitchFamily="2" charset="0"/>
+                <a:ea typeface="Bodoni Ornaments" pitchFamily="2" charset="0"/>
+              </a:rPr>
+              <a:t>Gladly for aye we adore Him</a:t>
+            </a:r>
+          </a:p>
+        </p:txBody>
+      </p:sp>
+    </p:spTree>
+    <p:extLst>
+      <p:ext uri="{BB962C8B-B14F-4D97-AF65-F5344CB8AC3E}">
+        <p14:creationId xmlns:p14="http://schemas.microsoft.com/office/powerpoint/2010/main" val="690701151"/>
+      </p:ext>
+    </p:extLst>
+  </p:cSld>
+  <p:clrMapOvr>
+    <a:masterClrMapping/>
+  </p:clrMapOvr>
+</p:sld>
+</file>
+
 <file path=ppt/theme/theme1.xml><?xml version="1.0" encoding="utf-8"?>
 <a:theme xmlns:a="http://schemas.openxmlformats.org/drawingml/2006/main" name="Office Theme">
   <a:themeElements>
-    <a:clrScheme name="Office">
+    <a:clrScheme name="Office Theme">
       <a:dk1>
         <a:sysClr val="windowText" lastClr="000000"/>
       </a:dk1>
@@ -4383,7 +4396,7 @@
         <a:srgbClr val="96607D"/>
       </a:folHlink>
     </a:clrScheme>
-    <a:fontScheme name="Office">
+    <a:fontScheme name="Office Theme">
       <a:majorFont>
         <a:latin typeface="Aptos Display" panose="02110004020202020204"/>
         <a:ea typeface=""/>
@@ -4489,7 +4502,7 @@
         <a:font script="Tfng" typeface="Ebrima"/>
       </a:minorFont>
     </a:fontScheme>
-    <a:fmtScheme name="Office">
+    <a:fmtScheme name="Office Theme">
       <a:fillStyleLst>
         <a:solidFill>
           <a:schemeClr val="phClr"/>

--- a/Praise To The Lord The Almighty.pptx
+++ b/Praise To The Lord The Almighty.pptx
@@ -253,7 +253,7 @@
           <a:p>
             <a:fld id="{E759A0DE-F190-5444-87AC-4719D5F20D15}" type="datetimeFigureOut">
               <a:rPr lang="en-US" smtClean="0"/>
-              <a:t>6/11/26</a:t>
+              <a:t>7/4/26</a:t>
             </a:fld>
             <a:endParaRPr lang="en-US"/>
           </a:p>
@@ -423,7 +423,7 @@
           <a:p>
             <a:fld id="{E759A0DE-F190-5444-87AC-4719D5F20D15}" type="datetimeFigureOut">
               <a:rPr lang="en-US" smtClean="0"/>
-              <a:t>6/11/26</a:t>
+              <a:t>7/4/26</a:t>
             </a:fld>
             <a:endParaRPr lang="en-US"/>
           </a:p>
@@ -603,7 +603,7 @@
           <a:p>
             <a:fld id="{E759A0DE-F190-5444-87AC-4719D5F20D15}" type="datetimeFigureOut">
               <a:rPr lang="en-US" smtClean="0"/>
-              <a:t>6/11/26</a:t>
+              <a:t>7/4/26</a:t>
             </a:fld>
             <a:endParaRPr lang="en-US"/>
           </a:p>
@@ -773,7 +773,7 @@
           <a:p>
             <a:fld id="{E759A0DE-F190-5444-87AC-4719D5F20D15}" type="datetimeFigureOut">
               <a:rPr lang="en-US" smtClean="0"/>
-              <a:t>6/11/26</a:t>
+              <a:t>7/4/26</a:t>
             </a:fld>
             <a:endParaRPr lang="en-US"/>
           </a:p>
@@ -1019,7 +1019,7 @@
           <a:p>
             <a:fld id="{E759A0DE-F190-5444-87AC-4719D5F20D15}" type="datetimeFigureOut">
               <a:rPr lang="en-US" smtClean="0"/>
-              <a:t>6/11/26</a:t>
+              <a:t>7/4/26</a:t>
             </a:fld>
             <a:endParaRPr lang="en-US"/>
           </a:p>
@@ -1251,7 +1251,7 @@
           <a:p>
             <a:fld id="{E759A0DE-F190-5444-87AC-4719D5F20D15}" type="datetimeFigureOut">
               <a:rPr lang="en-US" smtClean="0"/>
-              <a:t>6/11/26</a:t>
+              <a:t>7/4/26</a:t>
             </a:fld>
             <a:endParaRPr lang="en-US"/>
           </a:p>
@@ -1618,7 +1618,7 @@
           <a:p>
             <a:fld id="{E759A0DE-F190-5444-87AC-4719D5F20D15}" type="datetimeFigureOut">
               <a:rPr lang="en-US" smtClean="0"/>
-              <a:t>6/11/26</a:t>
+              <a:t>7/4/26</a:t>
             </a:fld>
             <a:endParaRPr lang="en-US"/>
           </a:p>
@@ -1736,7 +1736,7 @@
           <a:p>
             <a:fld id="{E759A0DE-F190-5444-87AC-4719D5F20D15}" type="datetimeFigureOut">
               <a:rPr lang="en-US" smtClean="0"/>
-              <a:t>6/11/26</a:t>
+              <a:t>7/4/26</a:t>
             </a:fld>
             <a:endParaRPr lang="en-US"/>
           </a:p>
@@ -1831,7 +1831,7 @@
           <a:p>
             <a:fld id="{E759A0DE-F190-5444-87AC-4719D5F20D15}" type="datetimeFigureOut">
               <a:rPr lang="en-US" smtClean="0"/>
-              <a:t>6/11/26</a:t>
+              <a:t>7/4/26</a:t>
             </a:fld>
             <a:endParaRPr lang="en-US"/>
           </a:p>
@@ -2108,7 +2108,7 @@
           <a:p>
             <a:fld id="{E759A0DE-F190-5444-87AC-4719D5F20D15}" type="datetimeFigureOut">
               <a:rPr lang="en-US" smtClean="0"/>
-              <a:t>6/11/26</a:t>
+              <a:t>7/4/26</a:t>
             </a:fld>
             <a:endParaRPr lang="en-US"/>
           </a:p>
@@ -2365,7 +2365,7 @@
           <a:p>
             <a:fld id="{E759A0DE-F190-5444-87AC-4719D5F20D15}" type="datetimeFigureOut">
               <a:rPr lang="en-US" smtClean="0"/>
-              <a:t>6/11/26</a:t>
+              <a:t>7/4/26</a:t>
             </a:fld>
             <a:endParaRPr lang="en-US"/>
           </a:p>
@@ -2578,7 +2578,7 @@
           <a:p>
             <a:fld id="{E759A0DE-F190-5444-87AC-4719D5F20D15}" type="datetimeFigureOut">
               <a:rPr lang="en-US" smtClean="0"/>
-              <a:t>6/11/26</a:t>
+              <a:t>7/4/26</a:t>
             </a:fld>
             <a:endParaRPr lang="en-US"/>
           </a:p>
@@ -3308,45 +3308,6 @@
           </a:p>
         </p:txBody>
       </p:sp>
-      <p:sp>
-        <p:nvSpPr>
-          <p:cNvPr id="2" name="TextBox 1">
-            <a:extLst>
-              <a:ext uri="{FF2B5EF4-FFF2-40B4-BE49-F238E27FC236}">
-                <a16:creationId xmlns:a16="http://schemas.microsoft.com/office/drawing/2014/main" id="{D82A351F-3465-BA92-8662-58E07FEFB0AE}"/>
-              </a:ext>
-            </a:extLst>
-          </p:cNvPr>
-          <p:cNvSpPr txBox="1"/>
-          <p:nvPr/>
-        </p:nvSpPr>
-        <p:spPr>
-          <a:xfrm>
-            <a:off x="7390614" y="6488668"/>
-            <a:ext cx="1753386" cy="369332"/>
-          </a:xfrm>
-          <a:prstGeom prst="rect">
-            <a:avLst/>
-          </a:prstGeom>
-          <a:noFill/>
-        </p:spPr>
-        <p:txBody>
-          <a:bodyPr wrap="square" rtlCol="0">
-            <a:spAutoFit/>
-          </a:bodyPr>
-          <a:lstStyle/>
-          <a:p>
-            <a:r>
-              <a:rPr lang="en-US" dirty="0">
-                <a:solidFill>
-                  <a:schemeClr val="bg1"/>
-                </a:solidFill>
-              </a:rPr>
-              <a:t>CCLI#7102397</a:t>
-            </a:r>
-          </a:p>
-        </p:txBody>
-      </p:sp>
     </p:spTree>
     <p:extLst>
       <p:ext uri="{BB962C8B-B14F-4D97-AF65-F5344CB8AC3E}">
